--- a/exports/pptx/lessons/middle-module-02-panchabhuta/day-08-project-session-1.pptx
+++ b/exports/pptx/lessons/middle-module-02-panchabhuta/day-08-project-session-1.pptx
@@ -16,9 +16,12 @@
     <p:sldId id="264" r:id="rId10"/>
     <p:sldId id="265" r:id="rId11"/>
     <p:sldId id="266" r:id="rId12"/>
+    <p:sldId id="267" r:id="rId13"/>
+    <p:sldId id="268" r:id="rId14"/>
+    <p:sldId id="269" r:id="rId15"/>
   </p:sldIdLst>
   <p:notesMasterIdLst>
-    <p:notesMasterId r:id="rId13"/>
+    <p:notesMasterId r:id="rId16"/>
   </p:notesMasterIdLst>
   <p:sldSz cx="9144000" cy="5143500"/>
   <p:notesSz cx="5143500" cy="9144000"/>
@@ -712,6 +715,270 @@
             <a:fld id="{F7021451-1387-4CA6-816F-3879F97B5CBC}" type="slidenum">
               <a:rPr lang="en-US"/>
               <a:t>11</a:t>
+            </a:fld>
+            <a:endParaRPr lang="en-US"/>
+          </a:p>
+        </p:txBody>
+      </p:sp>
+    </p:spTree>
+    <p:extLst>
+      <p:ext uri="{BB962C8B-B14F-4D97-AF65-F5344CB8AC3E}">
+        <p14:creationId xmlns:p14="http://schemas.microsoft.com/office/powerpoint/2010/main" val="1024086991"/>
+      </p:ext>
+    </p:extLst>
+  </p:cSld>
+  <p:clrMapOvr>
+    <a:masterClrMapping/>
+  </p:clrMapOvr>
+</p:notes>
+</file>
+
+<file path=ppt/notesSlides/notesSlide12.xml><?xml version="1.0" encoding="utf-8"?>
+<p:notes xmlns:a="http://schemas.openxmlformats.org/drawingml/2006/main" xmlns:r="http://schemas.openxmlformats.org/officeDocument/2006/relationships" xmlns:p="http://schemas.openxmlformats.org/presentationml/2006/main">
+  <p:cSld>
+    <p:spTree>
+      <p:nvGrpSpPr>
+        <p:cNvPr id="1" name=""/>
+        <p:cNvGrpSpPr/>
+        <p:nvPr/>
+      </p:nvGrpSpPr>
+      <p:grpSpPr>
+        <a:xfrm>
+          <a:off x="0" y="0"/>
+          <a:ext cx="0" cy="0"/>
+          <a:chOff x="0" y="0"/>
+          <a:chExt cx="0" cy="0"/>
+        </a:xfrm>
+      </p:grpSpPr>
+      <p:sp>
+        <p:nvSpPr>
+          <p:cNvPr id="2" name="Slide Image Placeholder 1"/>
+          <p:cNvSpPr>
+            <a:spLocks noGrp="1" noRot="1" noChangeAspect="1"/>
+          </p:cNvSpPr>
+          <p:nvPr>
+            <p:ph type="sldImg"/>
+          </p:nvPr>
+        </p:nvSpPr>
+        <p:spPr/>
+      </p:sp>
+      <p:sp>
+        <p:nvSpPr>
+          <p:cNvPr id="3" name="Notes Placeholder 2"/>
+          <p:cNvSpPr>
+            <a:spLocks noGrp="1"/>
+          </p:cNvSpPr>
+          <p:nvPr>
+            <p:ph type="body" idx="1"/>
+          </p:nvPr>
+        </p:nvSpPr>
+        <p:spPr/>
+        <p:txBody>
+          <a:bodyPr/>
+          <a:lstStyle/>
+          <a:p>
+            <a:r>
+              <a:rPr lang="en-US" dirty="0"/>
+              <a:t/>
+            </a:r>
+            <a:endParaRPr lang="en-US" dirty="0"/>
+          </a:p>
+        </p:txBody>
+      </p:sp>
+      <p:sp>
+        <p:nvSpPr>
+          <p:cNvPr id="4" name="Slide Number Placeholder 3"/>
+          <p:cNvSpPr>
+            <a:spLocks noGrp="1"/>
+          </p:cNvSpPr>
+          <p:nvPr>
+            <p:ph type="sldNum" sz="quarter" idx="10"/>
+          </p:nvPr>
+        </p:nvSpPr>
+        <p:spPr/>
+        <p:txBody>
+          <a:bodyPr/>
+          <a:lstStyle/>
+          <a:p>
+            <a:fld id="{F7021451-1387-4CA6-816F-3879F97B5CBC}" type="slidenum">
+              <a:rPr lang="en-US"/>
+              <a:t>12</a:t>
+            </a:fld>
+            <a:endParaRPr lang="en-US"/>
+          </a:p>
+        </p:txBody>
+      </p:sp>
+    </p:spTree>
+    <p:extLst>
+      <p:ext uri="{BB962C8B-B14F-4D97-AF65-F5344CB8AC3E}">
+        <p14:creationId xmlns:p14="http://schemas.microsoft.com/office/powerpoint/2010/main" val="1024086991"/>
+      </p:ext>
+    </p:extLst>
+  </p:cSld>
+  <p:clrMapOvr>
+    <a:masterClrMapping/>
+  </p:clrMapOvr>
+</p:notes>
+</file>
+
+<file path=ppt/notesSlides/notesSlide13.xml><?xml version="1.0" encoding="utf-8"?>
+<p:notes xmlns:a="http://schemas.openxmlformats.org/drawingml/2006/main" xmlns:r="http://schemas.openxmlformats.org/officeDocument/2006/relationships" xmlns:p="http://schemas.openxmlformats.org/presentationml/2006/main">
+  <p:cSld>
+    <p:spTree>
+      <p:nvGrpSpPr>
+        <p:cNvPr id="1" name=""/>
+        <p:cNvGrpSpPr/>
+        <p:nvPr/>
+      </p:nvGrpSpPr>
+      <p:grpSpPr>
+        <a:xfrm>
+          <a:off x="0" y="0"/>
+          <a:ext cx="0" cy="0"/>
+          <a:chOff x="0" y="0"/>
+          <a:chExt cx="0" cy="0"/>
+        </a:xfrm>
+      </p:grpSpPr>
+      <p:sp>
+        <p:nvSpPr>
+          <p:cNvPr id="2" name="Slide Image Placeholder 1"/>
+          <p:cNvSpPr>
+            <a:spLocks noGrp="1" noRot="1" noChangeAspect="1"/>
+          </p:cNvSpPr>
+          <p:nvPr>
+            <p:ph type="sldImg"/>
+          </p:nvPr>
+        </p:nvSpPr>
+        <p:spPr/>
+      </p:sp>
+      <p:sp>
+        <p:nvSpPr>
+          <p:cNvPr id="3" name="Notes Placeholder 2"/>
+          <p:cNvSpPr>
+            <a:spLocks noGrp="1"/>
+          </p:cNvSpPr>
+          <p:nvPr>
+            <p:ph type="body" idx="1"/>
+          </p:nvPr>
+        </p:nvSpPr>
+        <p:spPr/>
+        <p:txBody>
+          <a:bodyPr/>
+          <a:lstStyle/>
+          <a:p>
+            <a:r>
+              <a:rPr lang="en-US" dirty="0"/>
+              <a:t/>
+            </a:r>
+            <a:endParaRPr lang="en-US" dirty="0"/>
+          </a:p>
+        </p:txBody>
+      </p:sp>
+      <p:sp>
+        <p:nvSpPr>
+          <p:cNvPr id="4" name="Slide Number Placeholder 3"/>
+          <p:cNvSpPr>
+            <a:spLocks noGrp="1"/>
+          </p:cNvSpPr>
+          <p:nvPr>
+            <p:ph type="sldNum" sz="quarter" idx="10"/>
+          </p:nvPr>
+        </p:nvSpPr>
+        <p:spPr/>
+        <p:txBody>
+          <a:bodyPr/>
+          <a:lstStyle/>
+          <a:p>
+            <a:fld id="{F7021451-1387-4CA6-816F-3879F97B5CBC}" type="slidenum">
+              <a:rPr lang="en-US"/>
+              <a:t>13</a:t>
+            </a:fld>
+            <a:endParaRPr lang="en-US"/>
+          </a:p>
+        </p:txBody>
+      </p:sp>
+    </p:spTree>
+    <p:extLst>
+      <p:ext uri="{BB962C8B-B14F-4D97-AF65-F5344CB8AC3E}">
+        <p14:creationId xmlns:p14="http://schemas.microsoft.com/office/powerpoint/2010/main" val="1024086991"/>
+      </p:ext>
+    </p:extLst>
+  </p:cSld>
+  <p:clrMapOvr>
+    <a:masterClrMapping/>
+  </p:clrMapOvr>
+</p:notes>
+</file>
+
+<file path=ppt/notesSlides/notesSlide14.xml><?xml version="1.0" encoding="utf-8"?>
+<p:notes xmlns:a="http://schemas.openxmlformats.org/drawingml/2006/main" xmlns:r="http://schemas.openxmlformats.org/officeDocument/2006/relationships" xmlns:p="http://schemas.openxmlformats.org/presentationml/2006/main">
+  <p:cSld>
+    <p:spTree>
+      <p:nvGrpSpPr>
+        <p:cNvPr id="1" name=""/>
+        <p:cNvGrpSpPr/>
+        <p:nvPr/>
+      </p:nvGrpSpPr>
+      <p:grpSpPr>
+        <a:xfrm>
+          <a:off x="0" y="0"/>
+          <a:ext cx="0" cy="0"/>
+          <a:chOff x="0" y="0"/>
+          <a:chExt cx="0" cy="0"/>
+        </a:xfrm>
+      </p:grpSpPr>
+      <p:sp>
+        <p:nvSpPr>
+          <p:cNvPr id="2" name="Slide Image Placeholder 1"/>
+          <p:cNvSpPr>
+            <a:spLocks noGrp="1" noRot="1" noChangeAspect="1"/>
+          </p:cNvSpPr>
+          <p:nvPr>
+            <p:ph type="sldImg"/>
+          </p:nvPr>
+        </p:nvSpPr>
+        <p:spPr/>
+      </p:sp>
+      <p:sp>
+        <p:nvSpPr>
+          <p:cNvPr id="3" name="Notes Placeholder 2"/>
+          <p:cNvSpPr>
+            <a:spLocks noGrp="1"/>
+          </p:cNvSpPr>
+          <p:nvPr>
+            <p:ph type="body" idx="1"/>
+          </p:nvPr>
+        </p:nvSpPr>
+        <p:spPr/>
+        <p:txBody>
+          <a:bodyPr/>
+          <a:lstStyle/>
+          <a:p>
+            <a:r>
+              <a:rPr lang="en-US" dirty="0"/>
+              <a:t/>
+            </a:r>
+            <a:endParaRPr lang="en-US" dirty="0"/>
+          </a:p>
+        </p:txBody>
+      </p:sp>
+      <p:sp>
+        <p:nvSpPr>
+          <p:cNvPr id="4" name="Slide Number Placeholder 3"/>
+          <p:cNvSpPr>
+            <a:spLocks noGrp="1"/>
+          </p:cNvSpPr>
+          <p:nvPr>
+            <p:ph type="sldNum" sz="quarter" idx="10"/>
+          </p:nvPr>
+        </p:nvSpPr>
+        <p:spPr/>
+        <p:txBody>
+          <a:bodyPr/>
+          <a:lstStyle/>
+          <a:p>
+            <a:fld id="{F7021451-1387-4CA6-816F-3879F97B5CBC}" type="slidenum">
+              <a:rPr lang="en-US"/>
+              <a:t>14</a:t>
             </a:fld>
             <a:endParaRPr lang="en-US"/>
           </a:p>
@@ -2011,102 +2278,6 @@
         </p:nvSpPr>
         <p:spPr>
           <a:xfrm>
-            <a:off x="406301" y="1223963"/>
-            <a:ext cx="8498026" cy="274290"/>
-          </a:xfrm>
-          <a:prstGeom prst="rect">
-            <a:avLst/>
-          </a:prstGeom>
-          <a:noFill/>
-          <a:ln/>
-        </p:spPr>
-        <p:txBody>
-          <a:bodyPr wrap="square" lIns="0" tIns="0" rIns="0" bIns="0" rtlCol="0" anchor="t"/>
-          <a:lstStyle/>
-          <a:p>
-            <a:pPr algn="l" indent="0" marL="0">
-              <a:lnSpc>
-                <a:spcPts val="2160"/>
-              </a:lnSpc>
-              <a:spcBef>
-                <a:spcPts val="600"/>
-              </a:spcBef>
-              <a:spcAft>
-                <a:spcPts val="800"/>
-              </a:spcAft>
-              <a:buNone/>
-            </a:pPr>
-            <a:r>
-              <a:rPr lang="en-US" sz="1800" b="1" dirty="0">
-                <a:solidFill>
-                  <a:srgbClr val="FE4447"/>
-                </a:solidFill>
-                <a:latin typeface="Georgia" pitchFamily="34" charset="0"/>
-                <a:ea typeface="Georgia" pitchFamily="34" charset="-122"/>
-                <a:cs typeface="Georgia" pitchFamily="34" charset="-120"/>
-              </a:rPr>
-              <a:t>Learning objective</a:t>
-            </a:r>
-            <a:endParaRPr lang="en-US" sz="1800" dirty="0"/>
-          </a:p>
-        </p:txBody>
-      </p:sp>
-      <p:sp>
-        <p:nvSpPr>
-          <p:cNvPr id="6" name="Text 4"/>
-          <p:cNvSpPr/>
-          <p:nvPr/>
-        </p:nvSpPr>
-        <p:spPr>
-          <a:xfrm>
-            <a:off x="406301" y="1637854"/>
-            <a:ext cx="8498026" cy="426541"/>
-          </a:xfrm>
-          <a:prstGeom prst="rect">
-            <a:avLst/>
-          </a:prstGeom>
-          <a:noFill/>
-          <a:ln/>
-        </p:spPr>
-        <p:txBody>
-          <a:bodyPr wrap="square" lIns="0" tIns="0" rIns="0" bIns="0" rtlCol="0" anchor="t"/>
-          <a:lstStyle/>
-          <a:p>
-            <a:pPr algn="l" indent="0" marL="0">
-              <a:lnSpc>
-                <a:spcPts val="1680"/>
-              </a:lnSpc>
-              <a:spcBef>
-                <a:spcPts val="300"/>
-              </a:spcBef>
-              <a:spcAft>
-                <a:spcPts val="300"/>
-              </a:spcAft>
-              <a:buNone/>
-            </a:pPr>
-            <a:r>
-              <a:rPr lang="en-US" sz="1200" dirty="0">
-                <a:solidFill>
-                  <a:srgbClr val="1C2833"/>
-                </a:solidFill>
-                <a:latin typeface="Arial" pitchFamily="34" charset="0"/>
-                <a:ea typeface="Arial" pitchFamily="34" charset="-122"/>
-                <a:cs typeface="Arial" pitchFamily="34" charset="-120"/>
-              </a:rPr>
-              <a:t>By the end of this lesson, every pair / individual will have a written project plan and at least one tangible artefact (draft poster outline, demo prop, story opening paragraph, etc.) for their final project.</a:t>
-            </a:r>
-            <a:endParaRPr lang="en-US" sz="1200" dirty="0"/>
-          </a:p>
-        </p:txBody>
-      </p:sp>
-      <p:sp>
-        <p:nvSpPr>
-          <p:cNvPr id="7" name="Text 5"/>
-          <p:cNvSpPr/>
-          <p:nvPr/>
-        </p:nvSpPr>
-        <p:spPr>
-          <a:xfrm>
             <a:off x="406301" y="4434929"/>
             <a:ext cx="8498026" cy="213271"/>
           </a:xfrm>
@@ -2251,7 +2422,7 @@
                 <a:ea typeface="Georgia" pitchFamily="34" charset="-122"/>
                 <a:cs typeface="Georgia" pitchFamily="34" charset="-120"/>
               </a:rPr>
-              <a:t>Teacher notes</a:t>
+              <a:t>Student-facing content</a:t>
             </a:r>
             <a:endParaRPr lang="en-US" sz="1800" dirty="0"/>
           </a:p>
@@ -2265,8 +2436,61 @@
         </p:nvSpPr>
         <p:spPr>
           <a:xfrm>
-            <a:off x="406301" y="870942"/>
-            <a:ext cx="8498026" cy="639812"/>
+            <a:off x="406301" y="883593"/>
+            <a:ext cx="8331398" cy="3495675"/>
+          </a:xfrm>
+          <a:prstGeom prst="rect">
+            <a:avLst/>
+          </a:prstGeom>
+          <a:solidFill>
+            <a:srgbClr val="F4F8F9"/>
+          </a:solidFill>
+          <a:ln/>
+        </p:spPr>
+        <p:txBody>
+          <a:bodyPr wrap="square" rtlCol="0" anchor="ctr"/>
+          <a:lstStyle/>
+          <a:p>
+            <a:pPr indent="0" marL="0">
+              <a:buNone/>
+            </a:pPr>
+            <a:endParaRPr lang="en-US" dirty="0"/>
+          </a:p>
+        </p:txBody>
+      </p:sp>
+      <p:sp>
+        <p:nvSpPr>
+          <p:cNvPr id="5" name="Shape 3"/>
+          <p:cNvSpPr/>
+          <p:nvPr/>
+        </p:nvSpPr>
+        <p:spPr>
+          <a:xfrm>
+            <a:off x="434876" y="883593"/>
+            <a:ext cx="0" cy="3495675"/>
+          </a:xfrm>
+          <a:prstGeom prst="line">
+            <a:avLst/>
+          </a:prstGeom>
+          <a:noFill/>
+          <a:ln w="57150">
+            <a:solidFill>
+              <a:srgbClr val="FE4447"/>
+            </a:solidFill>
+            <a:prstDash val="solid"/>
+          </a:ln>
+        </p:spPr>
+      </p:sp>
+      <p:sp>
+        <p:nvSpPr>
+          <p:cNvPr id="6" name="Text 4"/>
+          <p:cNvSpPr/>
+          <p:nvPr/>
+        </p:nvSpPr>
+        <p:spPr>
+          <a:xfrm>
+            <a:off x="692051" y="1074093"/>
+            <a:ext cx="7973389" cy="230981"/>
           </a:xfrm>
           <a:prstGeom prst="rect">
             <a:avLst/>
@@ -2280,7 +2504,7 @@
           <a:p>
             <a:pPr algn="l" indent="0" marL="0">
               <a:lnSpc>
-                <a:spcPts val="1680"/>
+                <a:spcPts val="1820"/>
               </a:lnSpc>
               <a:spcBef>
                 <a:spcPts val="300"/>
@@ -2291,75 +2515,461 @@
               <a:buNone/>
             </a:pPr>
             <a:r>
-              <a:rPr lang="en-US" sz="1200" dirty="0">
-                <a:solidFill>
-                  <a:srgbClr val="1C2833"/>
-                </a:solidFill>
-                <a:latin typeface="Arial" pitchFamily="34" charset="0"/>
-                <a:ea typeface="Arial" pitchFamily="34" charset="-122"/>
-                <a:cs typeface="Arial" pitchFamily="34" charset="-120"/>
-              </a:rPr>
-              <a:t>– The pacing of three sprints is deliberate — most students will resist starting to build. The 10-minute timer forces them past planning paralysis. – If a pair seems stuck, ask: </a:t>
-            </a:r>
-            <a:pPr algn="l" indent="0" marL="0">
-              <a:lnSpc>
-                <a:spcPts val="1680"/>
-              </a:lnSpc>
-              <a:spcBef>
-                <a:spcPts val="300"/>
-              </a:spcBef>
-              <a:spcAft>
-                <a:spcPts val="300"/>
-              </a:spcAft>
-              <a:buNone/>
-            </a:pPr>
-            <a:r>
-              <a:rPr lang="en-US" sz="1200" i="1" dirty="0">
-                <a:solidFill>
-                  <a:srgbClr val="1C2833"/>
-                </a:solidFill>
-                <a:latin typeface="Arial" pitchFamily="34" charset="0"/>
-                <a:ea typeface="Arial" pitchFamily="34" charset="-122"/>
-                <a:cs typeface="Arial" pitchFamily="34" charset="-120"/>
-              </a:rPr>
-              <a:t>"If you had to present right now, in 30 seconds, what would you say?"</a:t>
-            </a:r>
-            <a:pPr algn="l" indent="0" marL="0">
-              <a:lnSpc>
-                <a:spcPts val="1680"/>
-              </a:lnSpc>
-              <a:spcBef>
-                <a:spcPts val="300"/>
-              </a:spcBef>
-              <a:spcAft>
-                <a:spcPts val="300"/>
-              </a:spcAft>
-              <a:buNone/>
-            </a:pPr>
-            <a:r>
-              <a:rPr lang="en-US" sz="1200" dirty="0">
-                <a:solidFill>
-                  <a:srgbClr val="1C2833"/>
-                </a:solidFill>
-                <a:latin typeface="Arial" pitchFamily="34" charset="0"/>
-                <a:ea typeface="Arial" pitchFamily="34" charset="-122"/>
-                <a:cs typeface="Arial" pitchFamily="34" charset="-120"/>
-              </a:rPr>
-              <a:t> That often unlocks the structure.</a:t>
-            </a:r>
-            <a:endParaRPr lang="en-US" sz="1200" dirty="0"/>
-          </a:p>
-        </p:txBody>
-      </p:sp>
-      <p:sp>
-        <p:nvSpPr>
-          <p:cNvPr id="5" name="Text 3"/>
+              <a:rPr lang="en-US" sz="1300" b="1" i="1" dirty="0">
+                <a:solidFill>
+                  <a:srgbClr val="1C2833"/>
+                </a:solidFill>
+                <a:latin typeface="Georgia" pitchFamily="34" charset="0"/>
+                <a:ea typeface="Georgia" pitchFamily="34" charset="-122"/>
+                <a:cs typeface="Georgia" pitchFamily="34" charset="-120"/>
+              </a:rPr>
+              <a:t>Project workshop — Session 1</a:t>
+            </a:r>
+            <a:endParaRPr lang="en-US" sz="1300" dirty="0"/>
+          </a:p>
+        </p:txBody>
+      </p:sp>
+      <p:sp>
+        <p:nvSpPr>
+          <p:cNvPr id="7" name="Text 5"/>
           <p:cNvSpPr/>
           <p:nvPr/>
         </p:nvSpPr>
         <p:spPr>
           <a:xfrm>
-            <a:off x="406301" y="4434929"/>
+            <a:off x="692051" y="1343174"/>
+            <a:ext cx="7973389" cy="230981"/>
+          </a:xfrm>
+          <a:prstGeom prst="rect">
+            <a:avLst/>
+          </a:prstGeom>
+          <a:noFill/>
+          <a:ln/>
+        </p:spPr>
+        <p:txBody>
+          <a:bodyPr wrap="square" lIns="0" tIns="0" rIns="0" bIns="0" rtlCol="0" anchor="t"/>
+          <a:lstStyle/>
+          <a:p>
+            <a:pPr algn="l" indent="0" marL="0">
+              <a:lnSpc>
+                <a:spcPts val="1820"/>
+              </a:lnSpc>
+              <a:spcBef>
+                <a:spcPts val="300"/>
+              </a:spcBef>
+              <a:spcAft>
+                <a:spcPts val="300"/>
+              </a:spcAft>
+              <a:buNone/>
+            </a:pPr>
+            <a:r>
+              <a:rPr lang="en-US" sz="1300" i="1" dirty="0">
+                <a:solidFill>
+                  <a:srgbClr val="1C2833"/>
+                </a:solidFill>
+                <a:latin typeface="Georgia" pitchFamily="34" charset="0"/>
+                <a:ea typeface="Georgia" pitchFamily="34" charset="-122"/>
+                <a:cs typeface="Georgia" pitchFamily="34" charset="-120"/>
+              </a:rPr>
+              <a:t>Today you'll plan and start your project. By end of class, your pair should have:</a:t>
+            </a:r>
+            <a:endParaRPr lang="en-US" sz="1300" dirty="0"/>
+          </a:p>
+        </p:txBody>
+      </p:sp>
+      <p:sp>
+        <p:nvSpPr>
+          <p:cNvPr id="8" name="Text 6"/>
+          <p:cNvSpPr/>
+          <p:nvPr/>
+        </p:nvSpPr>
+        <p:spPr>
+          <a:xfrm>
+            <a:off x="692051" y="1612255"/>
+            <a:ext cx="7973389" cy="230981"/>
+          </a:xfrm>
+          <a:prstGeom prst="rect">
+            <a:avLst/>
+          </a:prstGeom>
+          <a:noFill/>
+          <a:ln/>
+        </p:spPr>
+        <p:txBody>
+          <a:bodyPr wrap="square" lIns="0" tIns="0" rIns="0" bIns="0" rtlCol="0" anchor="t"/>
+          <a:lstStyle/>
+          <a:p>
+            <a:pPr algn="l" indent="0" marL="0">
+              <a:lnSpc>
+                <a:spcPts val="1820"/>
+              </a:lnSpc>
+              <a:spcBef>
+                <a:spcPts val="300"/>
+              </a:spcBef>
+              <a:spcAft>
+                <a:spcPts val="300"/>
+              </a:spcAft>
+              <a:buNone/>
+            </a:pPr>
+            <a:r>
+              <a:rPr lang="en-US" sz="1300" i="1" dirty="0">
+                <a:solidFill>
+                  <a:srgbClr val="1C2833"/>
+                </a:solidFill>
+                <a:latin typeface="Georgia" pitchFamily="34" charset="0"/>
+                <a:ea typeface="Georgia" pitchFamily="34" charset="-122"/>
+                <a:cs typeface="Georgia" pitchFamily="34" charset="-120"/>
+              </a:rPr>
+              <a:t>A written plan (the paragraph you turn in today).</a:t>
+            </a:r>
+            <a:endParaRPr lang="en-US" sz="1300" dirty="0"/>
+          </a:p>
+        </p:txBody>
+      </p:sp>
+      <p:sp>
+        <p:nvSpPr>
+          <p:cNvPr id="9" name="Text 7"/>
+          <p:cNvSpPr/>
+          <p:nvPr/>
+        </p:nvSpPr>
+        <p:spPr>
+          <a:xfrm>
+            <a:off x="692051" y="1881336"/>
+            <a:ext cx="7973389" cy="230981"/>
+          </a:xfrm>
+          <a:prstGeom prst="rect">
+            <a:avLst/>
+          </a:prstGeom>
+          <a:noFill/>
+          <a:ln/>
+        </p:spPr>
+        <p:txBody>
+          <a:bodyPr wrap="square" lIns="0" tIns="0" rIns="0" bIns="0" rtlCol="0" anchor="t"/>
+          <a:lstStyle/>
+          <a:p>
+            <a:pPr algn="l" indent="0" marL="0">
+              <a:lnSpc>
+                <a:spcPts val="1820"/>
+              </a:lnSpc>
+              <a:spcBef>
+                <a:spcPts val="300"/>
+              </a:spcBef>
+              <a:spcAft>
+                <a:spcPts val="300"/>
+              </a:spcAft>
+              <a:buNone/>
+            </a:pPr>
+            <a:r>
+              <a:rPr lang="en-US" sz="1300" i="1" dirty="0">
+                <a:solidFill>
+                  <a:srgbClr val="1C2833"/>
+                </a:solidFill>
+                <a:latin typeface="Georgia" pitchFamily="34" charset="0"/>
+                <a:ea typeface="Georgia" pitchFamily="34" charset="-122"/>
+                <a:cs typeface="Georgia" pitchFamily="34" charset="-120"/>
+              </a:rPr>
+              <a:t>Your first concrete artefact in progress — even if rough.</a:t>
+            </a:r>
+            <a:endParaRPr lang="en-US" sz="1300" dirty="0"/>
+          </a:p>
+        </p:txBody>
+      </p:sp>
+      <p:sp>
+        <p:nvSpPr>
+          <p:cNvPr id="10" name="Text 8"/>
+          <p:cNvSpPr/>
+          <p:nvPr/>
+        </p:nvSpPr>
+        <p:spPr>
+          <a:xfrm>
+            <a:off x="692051" y="2150418"/>
+            <a:ext cx="7973389" cy="230981"/>
+          </a:xfrm>
+          <a:prstGeom prst="rect">
+            <a:avLst/>
+          </a:prstGeom>
+          <a:noFill/>
+          <a:ln/>
+        </p:spPr>
+        <p:txBody>
+          <a:bodyPr wrap="square" lIns="0" tIns="0" rIns="0" bIns="0" rtlCol="0" anchor="t"/>
+          <a:lstStyle/>
+          <a:p>
+            <a:pPr algn="l" indent="0" marL="0">
+              <a:lnSpc>
+                <a:spcPts val="1820"/>
+              </a:lnSpc>
+              <a:spcBef>
+                <a:spcPts val="300"/>
+              </a:spcBef>
+              <a:spcAft>
+                <a:spcPts val="300"/>
+              </a:spcAft>
+              <a:buNone/>
+            </a:pPr>
+            <a:r>
+              <a:rPr lang="en-US" sz="1300" b="1" i="1" dirty="0">
+                <a:solidFill>
+                  <a:srgbClr val="1C2833"/>
+                </a:solidFill>
+                <a:latin typeface="Georgia" pitchFamily="34" charset="0"/>
+                <a:ea typeface="Georgia" pitchFamily="34" charset="-122"/>
+                <a:cs typeface="Georgia" pitchFamily="34" charset="-120"/>
+              </a:rPr>
+              <a:t>Plan template:</a:t>
+            </a:r>
+            <a:endParaRPr lang="en-US" sz="1300" dirty="0"/>
+          </a:p>
+        </p:txBody>
+      </p:sp>
+      <p:sp>
+        <p:nvSpPr>
+          <p:cNvPr id="11" name="Text 9"/>
+          <p:cNvSpPr/>
+          <p:nvPr/>
+        </p:nvSpPr>
+        <p:spPr>
+          <a:xfrm>
+            <a:off x="692051" y="2419499"/>
+            <a:ext cx="7973389" cy="461963"/>
+          </a:xfrm>
+          <a:prstGeom prst="rect">
+            <a:avLst/>
+          </a:prstGeom>
+          <a:noFill/>
+          <a:ln/>
+        </p:spPr>
+        <p:txBody>
+          <a:bodyPr wrap="square" lIns="0" tIns="0" rIns="0" bIns="0" rtlCol="0" anchor="t"/>
+          <a:lstStyle/>
+          <a:p>
+            <a:pPr algn="l" indent="0" marL="0">
+              <a:lnSpc>
+                <a:spcPts val="1820"/>
+              </a:lnSpc>
+              <a:spcBef>
+                <a:spcPts val="300"/>
+              </a:spcBef>
+              <a:spcAft>
+                <a:spcPts val="300"/>
+              </a:spcAft>
+              <a:buNone/>
+            </a:pPr>
+            <a:r>
+              <a:rPr lang="en-US" sz="1300" i="1" dirty="0">
+                <a:solidFill>
+                  <a:srgbClr val="1C2833"/>
+                </a:solidFill>
+                <a:latin typeface="Georgia" pitchFamily="34" charset="0"/>
+                <a:ea typeface="Georgia" pitchFamily="34" charset="-122"/>
+                <a:cs typeface="Georgia" pitchFamily="34" charset="-120"/>
+              </a:rPr>
+              <a:t>``` Element: __________ Title: __________ Audience walks away thinking: __________ Structure (3 parts):</a:t>
+            </a:r>
+            <a:endParaRPr lang="en-US" sz="1300" dirty="0"/>
+          </a:p>
+        </p:txBody>
+      </p:sp>
+      <p:sp>
+        <p:nvSpPr>
+          <p:cNvPr id="12" name="Text 10"/>
+          <p:cNvSpPr/>
+          <p:nvPr/>
+        </p:nvSpPr>
+        <p:spPr>
+          <a:xfrm>
+            <a:off x="692051" y="2919561"/>
+            <a:ext cx="7973389" cy="230981"/>
+          </a:xfrm>
+          <a:prstGeom prst="rect">
+            <a:avLst/>
+          </a:prstGeom>
+          <a:noFill/>
+          <a:ln/>
+        </p:spPr>
+        <p:txBody>
+          <a:bodyPr wrap="square" lIns="0" tIns="0" rIns="0" bIns="0" rtlCol="0" anchor="t"/>
+          <a:lstStyle/>
+          <a:p>
+            <a:pPr algn="l" indent="0" marL="0">
+              <a:lnSpc>
+                <a:spcPts val="1820"/>
+              </a:lnSpc>
+              <a:spcBef>
+                <a:spcPts val="300"/>
+              </a:spcBef>
+              <a:spcAft>
+                <a:spcPts val="300"/>
+              </a:spcAft>
+              <a:buNone/>
+            </a:pPr>
+            <a:r>
+              <a:rPr lang="en-US" sz="1300" i="1" dirty="0">
+                <a:solidFill>
+                  <a:srgbClr val="1C2833"/>
+                </a:solidFill>
+                <a:latin typeface="Georgia" pitchFamily="34" charset="0"/>
+                <a:ea typeface="Georgia" pitchFamily="34" charset="-122"/>
+                <a:cs typeface="Georgia" pitchFamily="34" charset="-120"/>
+              </a:rPr>
+              <a:t>__________</a:t>
+            </a:r>
+            <a:endParaRPr lang="en-US" sz="1300" dirty="0"/>
+          </a:p>
+        </p:txBody>
+      </p:sp>
+      <p:sp>
+        <p:nvSpPr>
+          <p:cNvPr id="13" name="Text 11"/>
+          <p:cNvSpPr/>
+          <p:nvPr/>
+        </p:nvSpPr>
+        <p:spPr>
+          <a:xfrm>
+            <a:off x="692051" y="3188643"/>
+            <a:ext cx="7973389" cy="230981"/>
+          </a:xfrm>
+          <a:prstGeom prst="rect">
+            <a:avLst/>
+          </a:prstGeom>
+          <a:noFill/>
+          <a:ln/>
+        </p:spPr>
+        <p:txBody>
+          <a:bodyPr wrap="square" lIns="0" tIns="0" rIns="0" bIns="0" rtlCol="0" anchor="t"/>
+          <a:lstStyle/>
+          <a:p>
+            <a:pPr algn="l" indent="0" marL="0">
+              <a:lnSpc>
+                <a:spcPts val="1820"/>
+              </a:lnSpc>
+              <a:spcBef>
+                <a:spcPts val="300"/>
+              </a:spcBef>
+              <a:spcAft>
+                <a:spcPts val="300"/>
+              </a:spcAft>
+              <a:buNone/>
+            </a:pPr>
+            <a:r>
+              <a:rPr lang="en-US" sz="1300" i="1" dirty="0">
+                <a:solidFill>
+                  <a:srgbClr val="1C2833"/>
+                </a:solidFill>
+                <a:latin typeface="Georgia" pitchFamily="34" charset="0"/>
+                <a:ea typeface="Georgia" pitchFamily="34" charset="-122"/>
+                <a:cs typeface="Georgia" pitchFamily="34" charset="-120"/>
+              </a:rPr>
+              <a:t>__________</a:t>
+            </a:r>
+            <a:endParaRPr lang="en-US" sz="1300" dirty="0"/>
+          </a:p>
+        </p:txBody>
+      </p:sp>
+      <p:sp>
+        <p:nvSpPr>
+          <p:cNvPr id="14" name="Text 12"/>
+          <p:cNvSpPr/>
+          <p:nvPr/>
+        </p:nvSpPr>
+        <p:spPr>
+          <a:xfrm>
+            <a:off x="692051" y="3457724"/>
+            <a:ext cx="7973389" cy="461963"/>
+          </a:xfrm>
+          <a:prstGeom prst="rect">
+            <a:avLst/>
+          </a:prstGeom>
+          <a:noFill/>
+          <a:ln/>
+        </p:spPr>
+        <p:txBody>
+          <a:bodyPr wrap="square" lIns="0" tIns="0" rIns="0" bIns="0" rtlCol="0" anchor="t"/>
+          <a:lstStyle/>
+          <a:p>
+            <a:pPr algn="l" indent="0" marL="0">
+              <a:lnSpc>
+                <a:spcPts val="1820"/>
+              </a:lnSpc>
+              <a:spcBef>
+                <a:spcPts val="300"/>
+              </a:spcBef>
+              <a:spcAft>
+                <a:spcPts val="300"/>
+              </a:spcAft>
+              <a:buNone/>
+            </a:pPr>
+            <a:r>
+              <a:rPr lang="en-US" sz="1300" i="1" dirty="0">
+                <a:solidFill>
+                  <a:srgbClr val="1C2833"/>
+                </a:solidFill>
+                <a:latin typeface="Georgia" pitchFamily="34" charset="0"/>
+                <a:ea typeface="Georgia" pitchFamily="34" charset="-122"/>
+                <a:cs typeface="Georgia" pitchFamily="34" charset="-120"/>
+              </a:rPr>
+              <a:t>__________ Division of labour (Partner A): __________ Division of labour (Partner B): __________ Sources we'll cite:</a:t>
+            </a:r>
+            <a:endParaRPr lang="en-US" sz="1300" dirty="0"/>
+          </a:p>
+        </p:txBody>
+      </p:sp>
+      <p:sp>
+        <p:nvSpPr>
+          <p:cNvPr id="15" name="Text 13"/>
+          <p:cNvSpPr/>
+          <p:nvPr/>
+        </p:nvSpPr>
+        <p:spPr>
+          <a:xfrm>
+            <a:off x="692051" y="3957786"/>
+            <a:ext cx="7973389" cy="230981"/>
+          </a:xfrm>
+          <a:prstGeom prst="rect">
+            <a:avLst/>
+          </a:prstGeom>
+          <a:noFill/>
+          <a:ln/>
+        </p:spPr>
+        <p:txBody>
+          <a:bodyPr wrap="square" lIns="0" tIns="0" rIns="0" bIns="0" rtlCol="0" anchor="t"/>
+          <a:lstStyle/>
+          <a:p>
+            <a:pPr algn="l" indent="0" marL="0">
+              <a:lnSpc>
+                <a:spcPts val="1820"/>
+              </a:lnSpc>
+              <a:spcBef>
+                <a:spcPts val="300"/>
+              </a:spcBef>
+              <a:spcAft>
+                <a:spcPts val="300"/>
+              </a:spcAft>
+              <a:buNone/>
+            </a:pPr>
+            <a:r>
+              <a:rPr lang="en-US" sz="1300" i="1" dirty="0">
+                <a:solidFill>
+                  <a:srgbClr val="1C2833"/>
+                </a:solidFill>
+                <a:latin typeface="Georgia" pitchFamily="34" charset="0"/>
+                <a:ea typeface="Georgia" pitchFamily="34" charset="-122"/>
+                <a:cs typeface="Georgia" pitchFamily="34" charset="-120"/>
+              </a:rPr>
+              <a:t>__________ (from class cache or sources.md) ```</a:t>
+            </a:r>
+            <a:endParaRPr lang="en-US" sz="1300" dirty="0"/>
+          </a:p>
+        </p:txBody>
+      </p:sp>
+      <p:sp>
+        <p:nvSpPr>
+          <p:cNvPr id="16" name="Text 14"/>
+          <p:cNvSpPr/>
+          <p:nvPr/>
+        </p:nvSpPr>
+        <p:spPr>
+          <a:xfrm>
+            <a:off x="406301" y="4544318"/>
             <a:ext cx="8498026" cy="213271"/>
           </a:xfrm>
           <a:prstGeom prst="rect">
@@ -2503,7 +3113,7 @@
                 <a:ea typeface="Georgia" pitchFamily="34" charset="-122"/>
                 <a:cs typeface="Georgia" pitchFamily="34" charset="-120"/>
               </a:rPr>
-              <a:t>Citation(s) used in this lesson</a:t>
+              <a:t>Homework</a:t>
             </a:r>
             <a:endParaRPr lang="en-US" sz="1800" dirty="0"/>
           </a:p>
@@ -2517,8 +3127,8 @@
         </p:nvSpPr>
         <p:spPr>
           <a:xfrm>
-            <a:off x="406301" y="870942"/>
-            <a:ext cx="8498026" cy="213271"/>
+            <a:off x="634901" y="883593"/>
+            <a:ext cx="8102798" cy="281880"/>
           </a:xfrm>
           <a:prstGeom prst="rect">
             <a:avLst/>
@@ -2530,6 +3140,132 @@
           <a:bodyPr wrap="square" lIns="0" tIns="0" rIns="0" bIns="0" rtlCol="0" anchor="t"/>
           <a:lstStyle/>
           <a:p>
+            <a:pPr algn="l" marL="342900" indent="-342900">
+              <a:lnSpc>
+                <a:spcPts val="1620"/>
+              </a:lnSpc>
+              <a:spcAft>
+                <a:spcPts val="300"/>
+              </a:spcAft>
+              <a:buSzPct val="100000"/>
+              <a:buChar char="•"/>
+            </a:pPr>
+            <a:r>
+              <a:rPr lang="en-US" sz="1200" dirty="0">
+                <a:solidFill>
+                  <a:srgbClr val="1C2833"/>
+                </a:solidFill>
+                <a:latin typeface="Arial" pitchFamily="34" charset="0"/>
+                <a:ea typeface="Arial" pitchFamily="34" charset="-122"/>
+                <a:cs typeface="Arial" pitchFamily="34" charset="-120"/>
+              </a:rPr>
+              <a:t>Whatever your pair didn't finish today — finish at home tonight. Tomorrow is for </a:t>
+            </a:r>
+            <a:pPr algn="l" indent="0" marL="0">
+              <a:lnSpc>
+                <a:spcPts val="1620"/>
+              </a:lnSpc>
+              <a:spcAft>
+                <a:spcPts val="300"/>
+              </a:spcAft>
+              <a:buNone/>
+            </a:pPr>
+            <a:r>
+              <a:rPr lang="en-US" sz="1200" i="1" dirty="0">
+                <a:solidFill>
+                  <a:srgbClr val="1C2833"/>
+                </a:solidFill>
+                <a:latin typeface="Arial" pitchFamily="34" charset="0"/>
+                <a:ea typeface="Arial" pitchFamily="34" charset="-122"/>
+                <a:cs typeface="Arial" pitchFamily="34" charset="-120"/>
+              </a:rPr>
+              <a:t>refining</a:t>
+            </a:r>
+            <a:pPr algn="l" indent="0" marL="0">
+              <a:lnSpc>
+                <a:spcPts val="1620"/>
+              </a:lnSpc>
+              <a:spcAft>
+                <a:spcPts val="300"/>
+              </a:spcAft>
+              <a:buNone/>
+            </a:pPr>
+            <a:r>
+              <a:rPr lang="en-US" sz="1200" dirty="0">
+                <a:solidFill>
+                  <a:srgbClr val="1C2833"/>
+                </a:solidFill>
+                <a:latin typeface="Arial" pitchFamily="34" charset="0"/>
+                <a:ea typeface="Arial" pitchFamily="34" charset="-122"/>
+                <a:cs typeface="Arial" pitchFamily="34" charset="-120"/>
+              </a:rPr>
+              <a:t>, not for </a:t>
+            </a:r>
+            <a:pPr algn="l" indent="0" marL="0">
+              <a:lnSpc>
+                <a:spcPts val="1620"/>
+              </a:lnSpc>
+              <a:spcAft>
+                <a:spcPts val="300"/>
+              </a:spcAft>
+              <a:buNone/>
+            </a:pPr>
+            <a:r>
+              <a:rPr lang="en-US" sz="1200" i="1" dirty="0">
+                <a:solidFill>
+                  <a:srgbClr val="1C2833"/>
+                </a:solidFill>
+                <a:latin typeface="Arial" pitchFamily="34" charset="0"/>
+                <a:ea typeface="Arial" pitchFamily="34" charset="-122"/>
+                <a:cs typeface="Arial" pitchFamily="34" charset="-120"/>
+              </a:rPr>
+              <a:t>starting</a:t>
+            </a:r>
+            <a:pPr algn="l" indent="0" marL="0">
+              <a:lnSpc>
+                <a:spcPts val="1620"/>
+              </a:lnSpc>
+              <a:spcAft>
+                <a:spcPts val="300"/>
+              </a:spcAft>
+              <a:buNone/>
+            </a:pPr>
+            <a:r>
+              <a:rPr lang="en-US" sz="1200" dirty="0">
+                <a:solidFill>
+                  <a:srgbClr val="1C2833"/>
+                </a:solidFill>
+                <a:latin typeface="Arial" pitchFamily="34" charset="0"/>
+                <a:ea typeface="Arial" pitchFamily="34" charset="-122"/>
+                <a:cs typeface="Arial" pitchFamily="34" charset="-120"/>
+              </a:rPr>
+              <a:t>.</a:t>
+            </a:r>
+            <a:endParaRPr lang="en-US" sz="1200" dirty="0"/>
+          </a:p>
+        </p:txBody>
+      </p:sp>
+      <p:sp>
+        <p:nvSpPr>
+          <p:cNvPr id="5" name="Text 3"/>
+          <p:cNvSpPr/>
+          <p:nvPr/>
+        </p:nvSpPr>
+        <p:spPr>
+          <a:xfrm>
+            <a:off x="406301" y="4434929"/>
+            <a:ext cx="8498026" cy="213271"/>
+          </a:xfrm>
+          <a:prstGeom prst="rect">
+            <a:avLst/>
+          </a:prstGeom>
+          <a:noFill/>
+          <a:ln/>
+        </p:spPr>
+        <p:txBody>
+          <a:bodyPr wrap="square" lIns="0" tIns="0" rIns="0" bIns="0" rtlCol="0" anchor="t"/>
+          <a:lstStyle/>
+          <a:p>
             <a:pPr algn="l" indent="0" marL="0">
               <a:lnSpc>
                 <a:spcPts val="1680"/>
@@ -2551,7 +3287,739 @@
                 <a:ea typeface="Arial" pitchFamily="34" charset="-122"/>
                 <a:cs typeface="Arial" pitchFamily="34" charset="-120"/>
               </a:rPr>
-              <a:t>– The pair's chosen source(s) — verified during Sprint 1.</a:t>
+              <a:t>Middle ·  · IKS Curriculum</a:t>
+            </a:r>
+            <a:endParaRPr lang="en-US" sz="1200" dirty="0"/>
+          </a:p>
+        </p:txBody>
+      </p:sp>
+    </p:spTree>
+  </p:cSld>
+  <p:clrMapOvr>
+    <a:masterClrMapping/>
+  </p:clrMapOvr>
+</p:sld>
+</file>
+
+<file path=ppt/slides/slide12.xml><?xml version="1.0" encoding="utf-8"?>
+<p:sld xmlns:a="http://schemas.openxmlformats.org/drawingml/2006/main" xmlns:r="http://schemas.openxmlformats.org/officeDocument/2006/relationships" xmlns:p="http://schemas.openxmlformats.org/presentationml/2006/main">
+  <p:cSld name="Slide 12">
+    <p:bg>
+      <p:bgPr>
+        <a:solidFill>
+          <a:srgbClr val="FFFFFF"/>
+        </a:solidFill>
+      </p:bgPr>
+    </p:bg>
+    <p:spTree>
+      <p:nvGrpSpPr>
+        <p:cNvPr id="1" name=""/>
+        <p:cNvGrpSpPr/>
+        <p:nvPr/>
+      </p:nvGrpSpPr>
+      <p:grpSpPr>
+        <a:xfrm>
+          <a:off x="0" y="0"/>
+          <a:ext cx="0" cy="0"/>
+          <a:chOff x="0" y="0"/>
+          <a:chExt cx="0" cy="0"/>
+        </a:xfrm>
+      </p:grpSpPr>
+      <p:sp>
+        <p:nvSpPr>
+          <p:cNvPr id="2" name="Text 0"/>
+          <p:cNvSpPr/>
+          <p:nvPr/>
+        </p:nvSpPr>
+        <p:spPr>
+          <a:xfrm>
+            <a:off x="0" y="0"/>
+            <a:ext cx="9144000" cy="101501"/>
+          </a:xfrm>
+          <a:prstGeom prst="rect">
+            <a:avLst/>
+          </a:prstGeom>
+          <a:solidFill>
+            <a:srgbClr val="277884"/>
+          </a:solidFill>
+          <a:ln/>
+        </p:spPr>
+        <p:txBody>
+          <a:bodyPr wrap="square" rtlCol="0" anchor="ctr"/>
+          <a:lstStyle/>
+          <a:p>
+            <a:pPr indent="0" marL="0">
+              <a:buNone/>
+            </a:pPr>
+            <a:endParaRPr lang="en-US" dirty="0"/>
+          </a:p>
+        </p:txBody>
+      </p:sp>
+      <p:sp>
+        <p:nvSpPr>
+          <p:cNvPr id="3" name="Text 1"/>
+          <p:cNvSpPr/>
+          <p:nvPr/>
+        </p:nvSpPr>
+        <p:spPr>
+          <a:xfrm>
+            <a:off x="406301" y="457051"/>
+            <a:ext cx="8498026" cy="274290"/>
+          </a:xfrm>
+          <a:prstGeom prst="rect">
+            <a:avLst/>
+          </a:prstGeom>
+          <a:noFill/>
+          <a:ln/>
+        </p:spPr>
+        <p:txBody>
+          <a:bodyPr wrap="square" lIns="0" tIns="0" rIns="0" bIns="0" rtlCol="0" anchor="t"/>
+          <a:lstStyle/>
+          <a:p>
+            <a:pPr algn="l" indent="0" marL="0">
+              <a:lnSpc>
+                <a:spcPts val="2160"/>
+              </a:lnSpc>
+              <a:spcBef>
+                <a:spcPts val="600"/>
+              </a:spcBef>
+              <a:spcAft>
+                <a:spcPts val="800"/>
+              </a:spcAft>
+              <a:buNone/>
+            </a:pPr>
+            <a:r>
+              <a:rPr lang="en-US" sz="1800" b="1" dirty="0">
+                <a:solidFill>
+                  <a:srgbClr val="FE4447"/>
+                </a:solidFill>
+                <a:latin typeface="Georgia" pitchFamily="34" charset="0"/>
+                <a:ea typeface="Georgia" pitchFamily="34" charset="-122"/>
+                <a:cs typeface="Georgia" pitchFamily="34" charset="-120"/>
+              </a:rPr>
+              <a:t>Differentiation</a:t>
+            </a:r>
+            <a:endParaRPr lang="en-US" sz="1800" dirty="0"/>
+          </a:p>
+        </p:txBody>
+      </p:sp>
+      <p:sp>
+        <p:nvSpPr>
+          <p:cNvPr id="4" name="Text 2"/>
+          <p:cNvSpPr/>
+          <p:nvPr/>
+        </p:nvSpPr>
+        <p:spPr>
+          <a:xfrm>
+            <a:off x="634901" y="883593"/>
+            <a:ext cx="8102798" cy="937022"/>
+          </a:xfrm>
+          <a:prstGeom prst="rect">
+            <a:avLst/>
+          </a:prstGeom>
+          <a:noFill/>
+          <a:ln/>
+        </p:spPr>
+        <p:txBody>
+          <a:bodyPr wrap="square" lIns="0" tIns="0" rIns="0" bIns="0" rtlCol="0" anchor="t"/>
+          <a:lstStyle/>
+          <a:p>
+            <a:pPr algn="l" marL="342900" indent="-342900">
+              <a:lnSpc>
+                <a:spcPts val="1620"/>
+              </a:lnSpc>
+              <a:spcAft>
+                <a:spcPts val="300"/>
+              </a:spcAft>
+              <a:buSzPct val="100000"/>
+              <a:buChar char="•"/>
+            </a:pPr>
+            <a:r>
+              <a:rPr lang="en-US" sz="1200" b="1" dirty="0">
+                <a:solidFill>
+                  <a:srgbClr val="1C2833"/>
+                </a:solidFill>
+                <a:latin typeface="Arial" pitchFamily="34" charset="0"/>
+                <a:ea typeface="Arial" pitchFamily="34" charset="-122"/>
+                <a:cs typeface="Arial" pitchFamily="34" charset="-120"/>
+              </a:rPr>
+              <a:t>One tier up:</a:t>
+            </a:r>
+            <a:pPr algn="l" indent="0" marL="0">
+              <a:lnSpc>
+                <a:spcPts val="1620"/>
+              </a:lnSpc>
+              <a:spcAft>
+                <a:spcPts val="300"/>
+              </a:spcAft>
+              <a:buNone/>
+            </a:pPr>
+            <a:r>
+              <a:rPr lang="en-US" sz="1200" dirty="0">
+                <a:solidFill>
+                  <a:srgbClr val="1C2833"/>
+                </a:solidFill>
+                <a:latin typeface="Arial" pitchFamily="34" charset="0"/>
+                <a:ea typeface="Arial" pitchFamily="34" charset="-122"/>
+                <a:cs typeface="Arial" pitchFamily="34" charset="-120"/>
+              </a:rPr>
+              <a:t> Stretch goal — add an interactive element (a question for the audience, a small experiment they can join). Adds depth.</a:t>
+            </a:r>
+            <a:endParaRPr lang="en-US" sz="1200" dirty="0"/>
+          </a:p>
+          <a:p>
+            <a:pPr algn="l" marL="342900" indent="-342900">
+              <a:lnSpc>
+                <a:spcPts val="1620"/>
+              </a:lnSpc>
+              <a:spcAft>
+                <a:spcPts val="300"/>
+              </a:spcAft>
+              <a:buSzPct val="100000"/>
+              <a:buChar char="•"/>
+            </a:pPr>
+            <a:r>
+              <a:rPr lang="en-US" sz="1200" b="1" dirty="0">
+                <a:solidFill>
+                  <a:srgbClr val="1C2833"/>
+                </a:solidFill>
+                <a:latin typeface="Arial" pitchFamily="34" charset="0"/>
+                <a:ea typeface="Arial" pitchFamily="34" charset="-122"/>
+                <a:cs typeface="Arial" pitchFamily="34" charset="-120"/>
+              </a:rPr>
+              <a:t>One tier down:</a:t>
+            </a:r>
+            <a:pPr algn="l" indent="0" marL="0">
+              <a:lnSpc>
+                <a:spcPts val="1620"/>
+              </a:lnSpc>
+              <a:spcAft>
+                <a:spcPts val="300"/>
+              </a:spcAft>
+              <a:buNone/>
+            </a:pPr>
+            <a:r>
+              <a:rPr lang="en-US" sz="1200" dirty="0">
+                <a:solidFill>
+                  <a:srgbClr val="1C2833"/>
+                </a:solidFill>
+                <a:latin typeface="Arial" pitchFamily="34" charset="0"/>
+                <a:ea typeface="Arial" pitchFamily="34" charset="-122"/>
+                <a:cs typeface="Arial" pitchFamily="34" charset="-120"/>
+              </a:rPr>
+              <a:t> Allow choosing a </a:t>
+            </a:r>
+            <a:pPr algn="l" indent="0" marL="0">
+              <a:lnSpc>
+                <a:spcPts val="1620"/>
+              </a:lnSpc>
+              <a:spcAft>
+                <a:spcPts val="300"/>
+              </a:spcAft>
+              <a:buNone/>
+            </a:pPr>
+            <a:r>
+              <a:rPr lang="en-US" sz="1200" i="1" dirty="0">
+                <a:solidFill>
+                  <a:srgbClr val="1C2833"/>
+                </a:solidFill>
+                <a:latin typeface="Arial" pitchFamily="34" charset="0"/>
+                <a:ea typeface="Arial" pitchFamily="34" charset="-122"/>
+                <a:cs typeface="Arial" pitchFamily="34" charset="-120"/>
+              </a:rPr>
+              <a:t>simpler</a:t>
+            </a:r>
+            <a:pPr algn="l" indent="0" marL="0">
+              <a:lnSpc>
+                <a:spcPts val="1620"/>
+              </a:lnSpc>
+              <a:spcAft>
+                <a:spcPts val="300"/>
+              </a:spcAft>
+              <a:buNone/>
+            </a:pPr>
+            <a:r>
+              <a:rPr lang="en-US" sz="1200" dirty="0">
+                <a:solidFill>
+                  <a:srgbClr val="1C2833"/>
+                </a:solidFill>
+                <a:latin typeface="Arial" pitchFamily="34" charset="0"/>
+                <a:ea typeface="Arial" pitchFamily="34" charset="-122"/>
+                <a:cs typeface="Arial" pitchFamily="34" charset="-120"/>
+              </a:rPr>
+              <a:t> format mid-stream if the original plan is collapsing. A clear poster beats a half-built video.</a:t>
+            </a:r>
+            <a:endParaRPr lang="en-US" sz="1200" dirty="0"/>
+          </a:p>
+        </p:txBody>
+      </p:sp>
+      <p:sp>
+        <p:nvSpPr>
+          <p:cNvPr id="5" name="Text 3"/>
+          <p:cNvSpPr/>
+          <p:nvPr/>
+        </p:nvSpPr>
+        <p:spPr>
+          <a:xfrm>
+            <a:off x="406301" y="4434929"/>
+            <a:ext cx="8498026" cy="213271"/>
+          </a:xfrm>
+          <a:prstGeom prst="rect">
+            <a:avLst/>
+          </a:prstGeom>
+          <a:noFill/>
+          <a:ln/>
+        </p:spPr>
+        <p:txBody>
+          <a:bodyPr wrap="square" lIns="0" tIns="0" rIns="0" bIns="0" rtlCol="0" anchor="t"/>
+          <a:lstStyle/>
+          <a:p>
+            <a:pPr algn="l" indent="0" marL="0">
+              <a:lnSpc>
+                <a:spcPts val="1680"/>
+              </a:lnSpc>
+              <a:spcBef>
+                <a:spcPts val="300"/>
+              </a:spcBef>
+              <a:spcAft>
+                <a:spcPts val="300"/>
+              </a:spcAft>
+              <a:buNone/>
+            </a:pPr>
+            <a:r>
+              <a:rPr lang="en-US" sz="1200" dirty="0">
+                <a:solidFill>
+                  <a:srgbClr val="1C2833"/>
+                </a:solidFill>
+                <a:latin typeface="Arial" pitchFamily="34" charset="0"/>
+                <a:ea typeface="Arial" pitchFamily="34" charset="-122"/>
+                <a:cs typeface="Arial" pitchFamily="34" charset="-120"/>
+              </a:rPr>
+              <a:t>Middle ·  · IKS Curriculum</a:t>
+            </a:r>
+            <a:endParaRPr lang="en-US" sz="1200" dirty="0"/>
+          </a:p>
+        </p:txBody>
+      </p:sp>
+    </p:spTree>
+  </p:cSld>
+  <p:clrMapOvr>
+    <a:masterClrMapping/>
+  </p:clrMapOvr>
+</p:sld>
+</file>
+
+<file path=ppt/slides/slide13.xml><?xml version="1.0" encoding="utf-8"?>
+<p:sld xmlns:a="http://schemas.openxmlformats.org/drawingml/2006/main" xmlns:r="http://schemas.openxmlformats.org/officeDocument/2006/relationships" xmlns:p="http://schemas.openxmlformats.org/presentationml/2006/main">
+  <p:cSld name="Slide 13">
+    <p:bg>
+      <p:bgPr>
+        <a:solidFill>
+          <a:srgbClr val="FFFFFF"/>
+        </a:solidFill>
+      </p:bgPr>
+    </p:bg>
+    <p:spTree>
+      <p:nvGrpSpPr>
+        <p:cNvPr id="1" name=""/>
+        <p:cNvGrpSpPr/>
+        <p:nvPr/>
+      </p:nvGrpSpPr>
+      <p:grpSpPr>
+        <a:xfrm>
+          <a:off x="0" y="0"/>
+          <a:ext cx="0" cy="0"/>
+          <a:chOff x="0" y="0"/>
+          <a:chExt cx="0" cy="0"/>
+        </a:xfrm>
+      </p:grpSpPr>
+      <p:sp>
+        <p:nvSpPr>
+          <p:cNvPr id="2" name="Text 0"/>
+          <p:cNvSpPr/>
+          <p:nvPr/>
+        </p:nvSpPr>
+        <p:spPr>
+          <a:xfrm>
+            <a:off x="0" y="0"/>
+            <a:ext cx="9144000" cy="101501"/>
+          </a:xfrm>
+          <a:prstGeom prst="rect">
+            <a:avLst/>
+          </a:prstGeom>
+          <a:solidFill>
+            <a:srgbClr val="277884"/>
+          </a:solidFill>
+          <a:ln/>
+        </p:spPr>
+        <p:txBody>
+          <a:bodyPr wrap="square" rtlCol="0" anchor="ctr"/>
+          <a:lstStyle/>
+          <a:p>
+            <a:pPr indent="0" marL="0">
+              <a:buNone/>
+            </a:pPr>
+            <a:endParaRPr lang="en-US" dirty="0"/>
+          </a:p>
+        </p:txBody>
+      </p:sp>
+      <p:sp>
+        <p:nvSpPr>
+          <p:cNvPr id="3" name="Text 1"/>
+          <p:cNvSpPr/>
+          <p:nvPr/>
+        </p:nvSpPr>
+        <p:spPr>
+          <a:xfrm>
+            <a:off x="406301" y="457051"/>
+            <a:ext cx="8498026" cy="274290"/>
+          </a:xfrm>
+          <a:prstGeom prst="rect">
+            <a:avLst/>
+          </a:prstGeom>
+          <a:noFill/>
+          <a:ln/>
+        </p:spPr>
+        <p:txBody>
+          <a:bodyPr wrap="square" lIns="0" tIns="0" rIns="0" bIns="0" rtlCol="0" anchor="t"/>
+          <a:lstStyle/>
+          <a:p>
+            <a:pPr algn="l" indent="0" marL="0">
+              <a:lnSpc>
+                <a:spcPts val="2160"/>
+              </a:lnSpc>
+              <a:spcBef>
+                <a:spcPts val="600"/>
+              </a:spcBef>
+              <a:spcAft>
+                <a:spcPts val="800"/>
+              </a:spcAft>
+              <a:buNone/>
+            </a:pPr>
+            <a:r>
+              <a:rPr lang="en-US" sz="1800" b="1" dirty="0">
+                <a:solidFill>
+                  <a:srgbClr val="FE4447"/>
+                </a:solidFill>
+                <a:latin typeface="Georgia" pitchFamily="34" charset="0"/>
+                <a:ea typeface="Georgia" pitchFamily="34" charset="-122"/>
+                <a:cs typeface="Georgia" pitchFamily="34" charset="-120"/>
+              </a:rPr>
+              <a:t>Teacher notes</a:t>
+            </a:r>
+            <a:endParaRPr lang="en-US" sz="1800" dirty="0"/>
+          </a:p>
+        </p:txBody>
+      </p:sp>
+      <p:sp>
+        <p:nvSpPr>
+          <p:cNvPr id="4" name="Text 2"/>
+          <p:cNvSpPr/>
+          <p:nvPr/>
+        </p:nvSpPr>
+        <p:spPr>
+          <a:xfrm>
+            <a:off x="634901" y="883593"/>
+            <a:ext cx="8102798" cy="937022"/>
+          </a:xfrm>
+          <a:prstGeom prst="rect">
+            <a:avLst/>
+          </a:prstGeom>
+          <a:noFill/>
+          <a:ln/>
+        </p:spPr>
+        <p:txBody>
+          <a:bodyPr wrap="square" lIns="0" tIns="0" rIns="0" bIns="0" rtlCol="0" anchor="t"/>
+          <a:lstStyle/>
+          <a:p>
+            <a:pPr algn="l" marL="342900" indent="-342900">
+              <a:lnSpc>
+                <a:spcPts val="1620"/>
+              </a:lnSpc>
+              <a:spcAft>
+                <a:spcPts val="300"/>
+              </a:spcAft>
+              <a:buSzPct val="100000"/>
+              <a:buChar char="•"/>
+            </a:pPr>
+            <a:r>
+              <a:rPr lang="en-US" sz="1200" dirty="0">
+                <a:solidFill>
+                  <a:srgbClr val="1C2833"/>
+                </a:solidFill>
+                <a:latin typeface="Arial" pitchFamily="34" charset="0"/>
+                <a:ea typeface="Arial" pitchFamily="34" charset="-122"/>
+                <a:cs typeface="Arial" pitchFamily="34" charset="-120"/>
+              </a:rPr>
+              <a:t>The pacing of three sprints is deliberate — most students will resist starting to build. The 10-minute timer forces them past planning paralysis.</a:t>
+            </a:r>
+            <a:endParaRPr lang="en-US" sz="1200" dirty="0"/>
+          </a:p>
+          <a:p>
+            <a:pPr algn="l" marL="342900" indent="-342900">
+              <a:lnSpc>
+                <a:spcPts val="1620"/>
+              </a:lnSpc>
+              <a:spcAft>
+                <a:spcPts val="300"/>
+              </a:spcAft>
+              <a:buSzPct val="100000"/>
+              <a:buChar char="•"/>
+            </a:pPr>
+            <a:r>
+              <a:rPr lang="en-US" sz="1200" dirty="0">
+                <a:solidFill>
+                  <a:srgbClr val="1C2833"/>
+                </a:solidFill>
+                <a:latin typeface="Arial" pitchFamily="34" charset="0"/>
+                <a:ea typeface="Arial" pitchFamily="34" charset="-122"/>
+                <a:cs typeface="Arial" pitchFamily="34" charset="-120"/>
+              </a:rPr>
+              <a:t>If a pair seems stuck, ask: </a:t>
+            </a:r>
+            <a:pPr algn="l" indent="0" marL="0">
+              <a:lnSpc>
+                <a:spcPts val="1620"/>
+              </a:lnSpc>
+              <a:spcAft>
+                <a:spcPts val="300"/>
+              </a:spcAft>
+              <a:buNone/>
+            </a:pPr>
+            <a:r>
+              <a:rPr lang="en-US" sz="1200" i="1" dirty="0">
+                <a:solidFill>
+                  <a:srgbClr val="1C2833"/>
+                </a:solidFill>
+                <a:latin typeface="Arial" pitchFamily="34" charset="0"/>
+                <a:ea typeface="Arial" pitchFamily="34" charset="-122"/>
+                <a:cs typeface="Arial" pitchFamily="34" charset="-120"/>
+              </a:rPr>
+              <a:t>"If you had to present right now, in 30 seconds, what would you say?"</a:t>
+            </a:r>
+            <a:pPr algn="l" indent="0" marL="0">
+              <a:lnSpc>
+                <a:spcPts val="1620"/>
+              </a:lnSpc>
+              <a:spcAft>
+                <a:spcPts val="300"/>
+              </a:spcAft>
+              <a:buNone/>
+            </a:pPr>
+            <a:r>
+              <a:rPr lang="en-US" sz="1200" dirty="0">
+                <a:solidFill>
+                  <a:srgbClr val="1C2833"/>
+                </a:solidFill>
+                <a:latin typeface="Arial" pitchFamily="34" charset="0"/>
+                <a:ea typeface="Arial" pitchFamily="34" charset="-122"/>
+                <a:cs typeface="Arial" pitchFamily="34" charset="-120"/>
+              </a:rPr>
+              <a:t> That often unlocks the structure.</a:t>
+            </a:r>
+            <a:endParaRPr lang="en-US" sz="1200" dirty="0"/>
+          </a:p>
+        </p:txBody>
+      </p:sp>
+      <p:sp>
+        <p:nvSpPr>
+          <p:cNvPr id="5" name="Text 3"/>
+          <p:cNvSpPr/>
+          <p:nvPr/>
+        </p:nvSpPr>
+        <p:spPr>
+          <a:xfrm>
+            <a:off x="406301" y="4434929"/>
+            <a:ext cx="8498026" cy="213271"/>
+          </a:xfrm>
+          <a:prstGeom prst="rect">
+            <a:avLst/>
+          </a:prstGeom>
+          <a:noFill/>
+          <a:ln/>
+        </p:spPr>
+        <p:txBody>
+          <a:bodyPr wrap="square" lIns="0" tIns="0" rIns="0" bIns="0" rtlCol="0" anchor="t"/>
+          <a:lstStyle/>
+          <a:p>
+            <a:pPr algn="l" indent="0" marL="0">
+              <a:lnSpc>
+                <a:spcPts val="1680"/>
+              </a:lnSpc>
+              <a:spcBef>
+                <a:spcPts val="300"/>
+              </a:spcBef>
+              <a:spcAft>
+                <a:spcPts val="300"/>
+              </a:spcAft>
+              <a:buNone/>
+            </a:pPr>
+            <a:r>
+              <a:rPr lang="en-US" sz="1200" dirty="0">
+                <a:solidFill>
+                  <a:srgbClr val="1C2833"/>
+                </a:solidFill>
+                <a:latin typeface="Arial" pitchFamily="34" charset="0"/>
+                <a:ea typeface="Arial" pitchFamily="34" charset="-122"/>
+                <a:cs typeface="Arial" pitchFamily="34" charset="-120"/>
+              </a:rPr>
+              <a:t>Middle ·  · IKS Curriculum</a:t>
+            </a:r>
+            <a:endParaRPr lang="en-US" sz="1200" dirty="0"/>
+          </a:p>
+        </p:txBody>
+      </p:sp>
+    </p:spTree>
+  </p:cSld>
+  <p:clrMapOvr>
+    <a:masterClrMapping/>
+  </p:clrMapOvr>
+</p:sld>
+</file>
+
+<file path=ppt/slides/slide14.xml><?xml version="1.0" encoding="utf-8"?>
+<p:sld xmlns:a="http://schemas.openxmlformats.org/drawingml/2006/main" xmlns:r="http://schemas.openxmlformats.org/officeDocument/2006/relationships" xmlns:p="http://schemas.openxmlformats.org/presentationml/2006/main">
+  <p:cSld name="Slide 14">
+    <p:bg>
+      <p:bgPr>
+        <a:solidFill>
+          <a:srgbClr val="FFFFFF"/>
+        </a:solidFill>
+      </p:bgPr>
+    </p:bg>
+    <p:spTree>
+      <p:nvGrpSpPr>
+        <p:cNvPr id="1" name=""/>
+        <p:cNvGrpSpPr/>
+        <p:nvPr/>
+      </p:nvGrpSpPr>
+      <p:grpSpPr>
+        <a:xfrm>
+          <a:off x="0" y="0"/>
+          <a:ext cx="0" cy="0"/>
+          <a:chOff x="0" y="0"/>
+          <a:chExt cx="0" cy="0"/>
+        </a:xfrm>
+      </p:grpSpPr>
+      <p:sp>
+        <p:nvSpPr>
+          <p:cNvPr id="2" name="Text 0"/>
+          <p:cNvSpPr/>
+          <p:nvPr/>
+        </p:nvSpPr>
+        <p:spPr>
+          <a:xfrm>
+            <a:off x="0" y="0"/>
+            <a:ext cx="9144000" cy="101501"/>
+          </a:xfrm>
+          <a:prstGeom prst="rect">
+            <a:avLst/>
+          </a:prstGeom>
+          <a:solidFill>
+            <a:srgbClr val="277884"/>
+          </a:solidFill>
+          <a:ln/>
+        </p:spPr>
+        <p:txBody>
+          <a:bodyPr wrap="square" rtlCol="0" anchor="ctr"/>
+          <a:lstStyle/>
+          <a:p>
+            <a:pPr indent="0" marL="0">
+              <a:buNone/>
+            </a:pPr>
+            <a:endParaRPr lang="en-US" dirty="0"/>
+          </a:p>
+        </p:txBody>
+      </p:sp>
+      <p:sp>
+        <p:nvSpPr>
+          <p:cNvPr id="3" name="Text 1"/>
+          <p:cNvSpPr/>
+          <p:nvPr/>
+        </p:nvSpPr>
+        <p:spPr>
+          <a:xfrm>
+            <a:off x="406301" y="457051"/>
+            <a:ext cx="8498026" cy="274290"/>
+          </a:xfrm>
+          <a:prstGeom prst="rect">
+            <a:avLst/>
+          </a:prstGeom>
+          <a:noFill/>
+          <a:ln/>
+        </p:spPr>
+        <p:txBody>
+          <a:bodyPr wrap="square" lIns="0" tIns="0" rIns="0" bIns="0" rtlCol="0" anchor="t"/>
+          <a:lstStyle/>
+          <a:p>
+            <a:pPr algn="l" indent="0" marL="0">
+              <a:lnSpc>
+                <a:spcPts val="2160"/>
+              </a:lnSpc>
+              <a:spcBef>
+                <a:spcPts val="600"/>
+              </a:spcBef>
+              <a:spcAft>
+                <a:spcPts val="800"/>
+              </a:spcAft>
+              <a:buNone/>
+            </a:pPr>
+            <a:r>
+              <a:rPr lang="en-US" sz="1800" b="1" dirty="0">
+                <a:solidFill>
+                  <a:srgbClr val="FE4447"/>
+                </a:solidFill>
+                <a:latin typeface="Georgia" pitchFamily="34" charset="0"/>
+                <a:ea typeface="Georgia" pitchFamily="34" charset="-122"/>
+                <a:cs typeface="Georgia" pitchFamily="34" charset="-120"/>
+              </a:rPr>
+              <a:t>Citation(s) used in this lesson</a:t>
+            </a:r>
+            <a:endParaRPr lang="en-US" sz="1800" dirty="0"/>
+          </a:p>
+        </p:txBody>
+      </p:sp>
+      <p:sp>
+        <p:nvSpPr>
+          <p:cNvPr id="4" name="Text 2"/>
+          <p:cNvSpPr/>
+          <p:nvPr/>
+        </p:nvSpPr>
+        <p:spPr>
+          <a:xfrm>
+            <a:off x="634901" y="883593"/>
+            <a:ext cx="8102798" cy="281880"/>
+          </a:xfrm>
+          <a:prstGeom prst="rect">
+            <a:avLst/>
+          </a:prstGeom>
+          <a:noFill/>
+          <a:ln/>
+        </p:spPr>
+        <p:txBody>
+          <a:bodyPr wrap="square" lIns="0" tIns="0" rIns="0" bIns="0" rtlCol="0" anchor="t"/>
+          <a:lstStyle/>
+          <a:p>
+            <a:pPr algn="l" marL="342900" indent="-342900">
+              <a:lnSpc>
+                <a:spcPts val="1620"/>
+              </a:lnSpc>
+              <a:spcAft>
+                <a:spcPts val="300"/>
+              </a:spcAft>
+              <a:buSzPct val="100000"/>
+              <a:buChar char="•"/>
+            </a:pPr>
+            <a:r>
+              <a:rPr lang="en-US" sz="1200" dirty="0">
+                <a:solidFill>
+                  <a:srgbClr val="1C2833"/>
+                </a:solidFill>
+                <a:latin typeface="Arial" pitchFamily="34" charset="0"/>
+                <a:ea typeface="Arial" pitchFamily="34" charset="-122"/>
+                <a:cs typeface="Arial" pitchFamily="34" charset="-120"/>
+              </a:rPr>
+              <a:t>The pair's chosen source(s) — verified during Sprint 1.</a:t>
             </a:r>
             <a:endParaRPr lang="en-US" sz="1200" dirty="0"/>
           </a:p>
@@ -2709,7 +4177,7 @@
                 <a:ea typeface="Georgia" pitchFamily="34" charset="-122"/>
                 <a:cs typeface="Georgia" pitchFamily="34" charset="-120"/>
               </a:rPr>
-              <a:t>Materials</a:t>
+              <a:t>Learning objective</a:t>
             </a:r>
             <a:endParaRPr lang="en-US" sz="1800" dirty="0"/>
           </a:p>
@@ -2724,7 +4192,7 @@
         <p:spPr>
           <a:xfrm>
             <a:off x="406301" y="870942"/>
-            <a:ext cx="8498026" cy="436066"/>
+            <a:ext cx="8498026" cy="426541"/>
           </a:xfrm>
           <a:prstGeom prst="rect">
             <a:avLst/>
@@ -2757,53 +4225,7 @@
                 <a:ea typeface="Arial" pitchFamily="34" charset="-122"/>
                 <a:cs typeface="Arial" pitchFamily="34" charset="-120"/>
               </a:rPr>
-              <a:t>– Project materials brought by each pair (as per their plan) – Spare poster paper, markers, scissors, glue – A printed copy of the rubric (</a:t>
-            </a:r>
-            <a:pPr algn="l" indent="0" marL="0">
-              <a:lnSpc>
-                <a:spcPts val="1680"/>
-              </a:lnSpc>
-              <a:spcBef>
-                <a:spcPts val="300"/>
-              </a:spcBef>
-              <a:spcAft>
-                <a:spcPts val="300"/>
-              </a:spcAft>
-              <a:buNone/>
-            </a:pPr>
-            <a:r>
-              <a:rPr lang="en-US" sz="1200" dirty="0">
-                <a:solidFill>
-                  <a:srgbClr val="1C2833"/>
-                </a:solidFill>
-                <a:latin typeface="Arial" pitchFamily="34" charset="0"/>
-                <a:ea typeface="Arial" pitchFamily="34" charset="-122"/>
-                <a:cs typeface="Arial" pitchFamily="34" charset="-120"/>
-              </a:rPr>
-              <a:t>assessments/rubric.md</a:t>
-            </a:r>
-            <a:pPr algn="l" indent="0" marL="0">
-              <a:lnSpc>
-                <a:spcPts val="1680"/>
-              </a:lnSpc>
-              <a:spcBef>
-                <a:spcPts val="300"/>
-              </a:spcBef>
-              <a:spcAft>
-                <a:spcPts val="300"/>
-              </a:spcAft>
-              <a:buNone/>
-            </a:pPr>
-            <a:r>
-              <a:rPr lang="en-US" sz="1200" dirty="0">
-                <a:solidFill>
-                  <a:srgbClr val="1C2833"/>
-                </a:solidFill>
-                <a:latin typeface="Arial" pitchFamily="34" charset="0"/>
-                <a:ea typeface="Arial" pitchFamily="34" charset="-122"/>
-                <a:cs typeface="Arial" pitchFamily="34" charset="-120"/>
-              </a:rPr>
-              <a:t>) per pair – Stopwatch / classroom timer</a:t>
+              <a:t>By the end of this lesson, every pair / individual will have a written project plan and at least one tangible artefact (draft poster outline, demo prop, story opening paragraph, etc.) for their final project.</a:t>
             </a:r>
             <a:endParaRPr lang="en-US" sz="1200" dirty="0"/>
           </a:p>
@@ -2961,7 +4383,7 @@
                 <a:ea typeface="Georgia" pitchFamily="34" charset="-122"/>
                 <a:cs typeface="Georgia" pitchFamily="34" charset="-120"/>
               </a:rPr>
-              <a:t>Lesson flow</a:t>
+              <a:t>Materials</a:t>
             </a:r>
             <a:endParaRPr lang="en-US" sz="1800" dirty="0"/>
           </a:p>
@@ -2970,6 +4392,164 @@
       <p:sp>
         <p:nvSpPr>
           <p:cNvPr id="4" name="Text 2"/>
+          <p:cNvSpPr/>
+          <p:nvPr/>
+        </p:nvSpPr>
+        <p:spPr>
+          <a:xfrm>
+            <a:off x="634901" y="883593"/>
+            <a:ext cx="8102798" cy="1032272"/>
+          </a:xfrm>
+          <a:prstGeom prst="rect">
+            <a:avLst/>
+          </a:prstGeom>
+          <a:noFill/>
+          <a:ln/>
+        </p:spPr>
+        <p:txBody>
+          <a:bodyPr wrap="square" lIns="0" tIns="0" rIns="0" bIns="0" rtlCol="0" anchor="t"/>
+          <a:lstStyle/>
+          <a:p>
+            <a:pPr algn="l" marL="342900" indent="-342900">
+              <a:lnSpc>
+                <a:spcPts val="1620"/>
+              </a:lnSpc>
+              <a:spcAft>
+                <a:spcPts val="300"/>
+              </a:spcAft>
+              <a:buSzPct val="100000"/>
+              <a:buChar char="•"/>
+            </a:pPr>
+            <a:r>
+              <a:rPr lang="en-US" sz="1200" dirty="0">
+                <a:solidFill>
+                  <a:srgbClr val="1C2833"/>
+                </a:solidFill>
+                <a:latin typeface="Arial" pitchFamily="34" charset="0"/>
+                <a:ea typeface="Arial" pitchFamily="34" charset="-122"/>
+                <a:cs typeface="Arial" pitchFamily="34" charset="-120"/>
+              </a:rPr>
+              <a:t>Project materials brought by each pair (as per their plan)</a:t>
+            </a:r>
+            <a:endParaRPr lang="en-US" sz="1200" dirty="0"/>
+          </a:p>
+          <a:p>
+            <a:pPr algn="l" marL="342900" indent="-342900">
+              <a:lnSpc>
+                <a:spcPts val="1620"/>
+              </a:lnSpc>
+              <a:spcAft>
+                <a:spcPts val="300"/>
+              </a:spcAft>
+              <a:buSzPct val="100000"/>
+              <a:buChar char="•"/>
+            </a:pPr>
+            <a:r>
+              <a:rPr lang="en-US" sz="1200" dirty="0">
+                <a:solidFill>
+                  <a:srgbClr val="1C2833"/>
+                </a:solidFill>
+                <a:latin typeface="Arial" pitchFamily="34" charset="0"/>
+                <a:ea typeface="Arial" pitchFamily="34" charset="-122"/>
+                <a:cs typeface="Arial" pitchFamily="34" charset="-120"/>
+              </a:rPr>
+              <a:t>Spare poster paper, markers, scissors, glue</a:t>
+            </a:r>
+            <a:endParaRPr lang="en-US" sz="1200" dirty="0"/>
+          </a:p>
+          <a:p>
+            <a:pPr algn="l" marL="342900" indent="-342900">
+              <a:lnSpc>
+                <a:spcPts val="1620"/>
+              </a:lnSpc>
+              <a:spcAft>
+                <a:spcPts val="300"/>
+              </a:spcAft>
+              <a:buSzPct val="100000"/>
+              <a:buChar char="•"/>
+            </a:pPr>
+            <a:r>
+              <a:rPr lang="en-US" sz="1200" dirty="0">
+                <a:solidFill>
+                  <a:srgbClr val="1C2833"/>
+                </a:solidFill>
+                <a:latin typeface="Arial" pitchFamily="34" charset="0"/>
+                <a:ea typeface="Arial" pitchFamily="34" charset="-122"/>
+                <a:cs typeface="Arial" pitchFamily="34" charset="-120"/>
+              </a:rPr>
+              <a:t>A printed copy of the rubric (</a:t>
+            </a:r>
+            <a:pPr algn="l" indent="0" marL="0">
+              <a:lnSpc>
+                <a:spcPts val="1620"/>
+              </a:lnSpc>
+              <a:spcAft>
+                <a:spcPts val="300"/>
+              </a:spcAft>
+              <a:buNone/>
+            </a:pPr>
+            <a:r>
+              <a:rPr lang="en-US" sz="1200" dirty="0">
+                <a:solidFill>
+                  <a:srgbClr val="1C2833"/>
+                </a:solidFill>
+                <a:latin typeface="Arial" pitchFamily="34" charset="0"/>
+                <a:ea typeface="Arial" pitchFamily="34" charset="-122"/>
+                <a:cs typeface="Arial" pitchFamily="34" charset="-120"/>
+              </a:rPr>
+              <a:t>assessments/rubric.md</a:t>
+            </a:r>
+            <a:pPr algn="l" indent="0" marL="0">
+              <a:lnSpc>
+                <a:spcPts val="1620"/>
+              </a:lnSpc>
+              <a:spcAft>
+                <a:spcPts val="300"/>
+              </a:spcAft>
+              <a:buNone/>
+            </a:pPr>
+            <a:r>
+              <a:rPr lang="en-US" sz="1200" dirty="0">
+                <a:solidFill>
+                  <a:srgbClr val="1C2833"/>
+                </a:solidFill>
+                <a:latin typeface="Arial" pitchFamily="34" charset="0"/>
+                <a:ea typeface="Arial" pitchFamily="34" charset="-122"/>
+                <a:cs typeface="Arial" pitchFamily="34" charset="-120"/>
+              </a:rPr>
+              <a:t>) per pair</a:t>
+            </a:r>
+            <a:endParaRPr lang="en-US" sz="1200" dirty="0"/>
+          </a:p>
+          <a:p>
+            <a:pPr algn="l" marL="342900" indent="-342900">
+              <a:lnSpc>
+                <a:spcPts val="1620"/>
+              </a:lnSpc>
+              <a:spcAft>
+                <a:spcPts val="300"/>
+              </a:spcAft>
+              <a:buSzPct val="100000"/>
+              <a:buChar char="•"/>
+            </a:pPr>
+            <a:r>
+              <a:rPr lang="en-US" sz="1200" dirty="0">
+                <a:solidFill>
+                  <a:srgbClr val="1C2833"/>
+                </a:solidFill>
+                <a:latin typeface="Arial" pitchFamily="34" charset="0"/>
+                <a:ea typeface="Arial" pitchFamily="34" charset="-122"/>
+                <a:cs typeface="Arial" pitchFamily="34" charset="-120"/>
+              </a:rPr>
+              <a:t>Stopwatch / classroom timer</a:t>
+            </a:r>
+            <a:endParaRPr lang="en-US" sz="1200" dirty="0"/>
+          </a:p>
+        </p:txBody>
+      </p:sp>
+      <p:sp>
+        <p:nvSpPr>
+          <p:cNvPr id="5" name="Text 3"/>
           <p:cNvSpPr/>
           <p:nvPr/>
         </p:nvSpPr>
@@ -3119,7 +4699,7 @@
                 <a:ea typeface="Georgia" pitchFamily="34" charset="-122"/>
                 <a:cs typeface="Georgia" pitchFamily="34" charset="-120"/>
               </a:rPr>
-              <a:t>Warm-up (5 min)</a:t>
+              <a:t>Lesson flow</a:t>
             </a:r>
             <a:endParaRPr lang="en-US" sz="1800" dirty="0"/>
           </a:p>
@@ -3128,77 +4708,6 @@
       <p:sp>
         <p:nvSpPr>
           <p:cNvPr id="4" name="Text 2"/>
-          <p:cNvSpPr/>
-          <p:nvPr/>
-        </p:nvSpPr>
-        <p:spPr>
-          <a:xfrm>
-            <a:off x="406301" y="870942"/>
-            <a:ext cx="8498026" cy="426541"/>
-          </a:xfrm>
-          <a:prstGeom prst="rect">
-            <a:avLst/>
-          </a:prstGeom>
-          <a:noFill/>
-          <a:ln/>
-        </p:spPr>
-        <p:txBody>
-          <a:bodyPr wrap="square" lIns="0" tIns="0" rIns="0" bIns="0" rtlCol="0" anchor="t"/>
-          <a:lstStyle/>
-          <a:p>
-            <a:pPr algn="l" indent="0" marL="0">
-              <a:lnSpc>
-                <a:spcPts val="1680"/>
-              </a:lnSpc>
-              <a:spcBef>
-                <a:spcPts val="300"/>
-              </a:spcBef>
-              <a:spcAft>
-                <a:spcPts val="300"/>
-              </a:spcAft>
-              <a:buNone/>
-            </a:pPr>
-            <a:r>
-              <a:rPr lang="en-US" sz="1200" dirty="0">
-                <a:solidFill>
-                  <a:srgbClr val="1C2833"/>
-                </a:solidFill>
-                <a:latin typeface="Arial" pitchFamily="34" charset="0"/>
-                <a:ea typeface="Arial" pitchFamily="34" charset="-122"/>
-                <a:cs typeface="Arial" pitchFamily="34" charset="-120"/>
-              </a:rPr>
-              <a:t>– Daily prompt — 2 students. – Hand out the rubric. Walk through it in 60 seconds: </a:t>
-            </a:r>
-            <a:pPr algn="l" indent="0" marL="0">
-              <a:lnSpc>
-                <a:spcPts val="1680"/>
-              </a:lnSpc>
-              <a:spcBef>
-                <a:spcPts val="300"/>
-              </a:spcBef>
-              <a:spcAft>
-                <a:spcPts val="300"/>
-              </a:spcAft>
-              <a:buNone/>
-            </a:pPr>
-            <a:r>
-              <a:rPr lang="en-US" sz="1200" i="1" dirty="0">
-                <a:solidFill>
-                  <a:srgbClr val="1C2833"/>
-                </a:solidFill>
-                <a:latin typeface="Arial" pitchFamily="34" charset="0"/>
-                <a:ea typeface="Arial" pitchFamily="34" charset="-122"/>
-                <a:cs typeface="Arial" pitchFamily="34" charset="-120"/>
-              </a:rPr>
-              <a:t>"You'll be graded on accuracy, use of sources, originality, communication, collaboration, and presentation. Highest mark in each row is 4."</a:t>
-            </a:r>
-            <a:endParaRPr lang="en-US" sz="1200" dirty="0"/>
-          </a:p>
-        </p:txBody>
-      </p:sp>
-      <p:sp>
-        <p:nvSpPr>
-          <p:cNvPr id="5" name="Text 3"/>
           <p:cNvSpPr/>
           <p:nvPr/>
         </p:nvSpPr>
@@ -3348,7 +4857,7 @@
                 <a:ea typeface="Georgia" pitchFamily="34" charset="-122"/>
                 <a:cs typeface="Georgia" pitchFamily="34" charset="-120"/>
               </a:rPr>
-              <a:t>Core (35 min) — Workshop</a:t>
+              <a:t>Warm-up (5 min)</a:t>
             </a:r>
             <a:endParaRPr lang="en-US" sz="1800" dirty="0"/>
           </a:p>
@@ -3362,8 +4871,8 @@
         </p:nvSpPr>
         <p:spPr>
           <a:xfrm>
-            <a:off x="406301" y="870942"/>
-            <a:ext cx="8498026" cy="213271"/>
+            <a:off x="634901" y="883593"/>
+            <a:ext cx="8102798" cy="731341"/>
           </a:xfrm>
           <a:prstGeom prst="rect">
             <a:avLst/>
@@ -3375,77 +4884,6 @@
           <a:bodyPr wrap="square" lIns="0" tIns="0" rIns="0" bIns="0" rtlCol="0" anchor="t"/>
           <a:lstStyle/>
           <a:p>
-            <a:pPr algn="l" indent="0" marL="0">
-              <a:lnSpc>
-                <a:spcPts val="1680"/>
-              </a:lnSpc>
-              <a:spcBef>
-                <a:spcPts val="300"/>
-              </a:spcBef>
-              <a:spcAft>
-                <a:spcPts val="300"/>
-              </a:spcAft>
-              <a:buNone/>
-            </a:pPr>
-            <a:r>
-              <a:rPr lang="en-US" sz="1200" b="1" dirty="0">
-                <a:solidFill>
-                  <a:srgbClr val="1C2833"/>
-                </a:solidFill>
-                <a:latin typeface="Arial" pitchFamily="34" charset="0"/>
-                <a:ea typeface="Arial" pitchFamily="34" charset="-122"/>
-                <a:cs typeface="Arial" pitchFamily="34" charset="-120"/>
-              </a:rPr>
-              <a:t>Structure:</a:t>
-            </a:r>
-            <a:pPr algn="l" indent="0" marL="0">
-              <a:lnSpc>
-                <a:spcPts val="1680"/>
-              </a:lnSpc>
-              <a:spcBef>
-                <a:spcPts val="300"/>
-              </a:spcBef>
-              <a:spcAft>
-                <a:spcPts val="300"/>
-              </a:spcAft>
-              <a:buNone/>
-            </a:pPr>
-            <a:r>
-              <a:rPr lang="en-US" sz="1200" dirty="0">
-                <a:solidFill>
-                  <a:srgbClr val="1C2833"/>
-                </a:solidFill>
-                <a:latin typeface="Arial" pitchFamily="34" charset="0"/>
-                <a:ea typeface="Arial" pitchFamily="34" charset="-122"/>
-                <a:cs typeface="Arial" pitchFamily="34" charset="-120"/>
-              </a:rPr>
-              <a:t> Three 10-minute sprints with a 1-minute "stand and stretch" between each.</a:t>
-            </a:r>
-            <a:endParaRPr lang="en-US" sz="1200" dirty="0"/>
-          </a:p>
-        </p:txBody>
-      </p:sp>
-      <p:sp>
-        <p:nvSpPr>
-          <p:cNvPr id="5" name="Text 3"/>
-          <p:cNvSpPr/>
-          <p:nvPr/>
-        </p:nvSpPr>
-        <p:spPr>
-          <a:xfrm>
-            <a:off x="634901" y="1173063"/>
-            <a:ext cx="8102798" cy="281880"/>
-          </a:xfrm>
-          <a:prstGeom prst="rect">
-            <a:avLst/>
-          </a:prstGeom>
-          <a:noFill/>
-          <a:ln/>
-        </p:spPr>
-        <p:txBody>
-          <a:bodyPr wrap="square" lIns="0" tIns="0" rIns="0" bIns="0" rtlCol="0" anchor="t"/>
-          <a:lstStyle/>
-          <a:p>
             <a:pPr algn="l" marL="342900" indent="-342900">
               <a:lnSpc>
                 <a:spcPts val="1620"/>
@@ -3457,26 +4895,6 @@
               <a:buChar char="•"/>
             </a:pPr>
             <a:r>
-              <a:rPr lang="en-US" sz="1200" b="1" dirty="0">
-                <a:solidFill>
-                  <a:srgbClr val="1C2833"/>
-                </a:solidFill>
-                <a:latin typeface="Arial" pitchFamily="34" charset="0"/>
-                <a:ea typeface="Arial" pitchFamily="34" charset="-122"/>
-                <a:cs typeface="Arial" pitchFamily="34" charset="-120"/>
-              </a:rPr>
-              <a:t>Sprint 1 (10 min) — Plan completion.</a:t>
-            </a:r>
-            <a:pPr algn="l" indent="0" marL="0">
-              <a:lnSpc>
-                <a:spcPts val="1620"/>
-              </a:lnSpc>
-              <a:spcAft>
-                <a:spcPts val="300"/>
-              </a:spcAft>
-              <a:buNone/>
-            </a:pPr>
-            <a:r>
               <a:rPr lang="en-US" sz="1200" dirty="0">
                 <a:solidFill>
                   <a:srgbClr val="1C2833"/>
@@ -3485,126 +4903,10 @@
                 <a:ea typeface="Arial" pitchFamily="34" charset="-122"/>
                 <a:cs typeface="Arial" pitchFamily="34" charset="-120"/>
               </a:rPr>
-              <a:t> Every pair finalises:</a:t>
+              <a:t>Daily prompt — 2 students.</a:t>
             </a:r>
             <a:endParaRPr lang="en-US" sz="1200" dirty="0"/>
           </a:p>
-        </p:txBody>
-      </p:sp>
-      <p:sp>
-        <p:nvSpPr>
-          <p:cNvPr id="6" name="Text 4"/>
-          <p:cNvSpPr/>
-          <p:nvPr/>
-        </p:nvSpPr>
-        <p:spPr>
-          <a:xfrm>
-            <a:off x="406301" y="1543794"/>
-            <a:ext cx="8498026" cy="649337"/>
-          </a:xfrm>
-          <a:prstGeom prst="rect">
-            <a:avLst/>
-          </a:prstGeom>
-          <a:noFill/>
-          <a:ln/>
-        </p:spPr>
-        <p:txBody>
-          <a:bodyPr wrap="square" lIns="0" tIns="0" rIns="0" bIns="0" rtlCol="0" anchor="t"/>
-          <a:lstStyle/>
-          <a:p>
-            <a:pPr algn="l" indent="0" marL="0">
-              <a:lnSpc>
-                <a:spcPts val="1680"/>
-              </a:lnSpc>
-              <a:spcBef>
-                <a:spcPts val="300"/>
-              </a:spcBef>
-              <a:spcAft>
-                <a:spcPts val="300"/>
-              </a:spcAft>
-              <a:buNone/>
-            </a:pPr>
-            <a:r>
-              <a:rPr lang="en-US" sz="1200" dirty="0">
-                <a:solidFill>
-                  <a:srgbClr val="1C2833"/>
-                </a:solidFill>
-                <a:latin typeface="Arial" pitchFamily="34" charset="0"/>
-                <a:ea typeface="Arial" pitchFamily="34" charset="-122"/>
-                <a:cs typeface="Arial" pitchFamily="34" charset="-120"/>
-              </a:rPr>
-              <a:t>– Element + project title – The single sentence the audience should walk away thinking – The structure (3 parts max: e.g. "what tradition says / one science parallel / one local imbalance") – The division of labour (who does what) – The source(s) they will cite (must include one RAG citation from Day 1–3 caches, OR a citation from </a:t>
-            </a:r>
-            <a:pPr algn="l" indent="0" marL="0">
-              <a:lnSpc>
-                <a:spcPts val="1680"/>
-              </a:lnSpc>
-              <a:spcBef>
-                <a:spcPts val="300"/>
-              </a:spcBef>
-              <a:spcAft>
-                <a:spcPts val="300"/>
-              </a:spcAft>
-              <a:buNone/>
-            </a:pPr>
-            <a:r>
-              <a:rPr lang="en-US" sz="1200" dirty="0">
-                <a:solidFill>
-                  <a:srgbClr val="1C2833"/>
-                </a:solidFill>
-                <a:latin typeface="Arial" pitchFamily="34" charset="0"/>
-                <a:ea typeface="Arial" pitchFamily="34" charset="-122"/>
-                <a:cs typeface="Arial" pitchFamily="34" charset="-120"/>
-              </a:rPr>
-              <a:t>sources.md</a:t>
-            </a:r>
-            <a:pPr algn="l" indent="0" marL="0">
-              <a:lnSpc>
-                <a:spcPts val="1680"/>
-              </a:lnSpc>
-              <a:spcBef>
-                <a:spcPts val="300"/>
-              </a:spcBef>
-              <a:spcAft>
-                <a:spcPts val="300"/>
-              </a:spcAft>
-              <a:buNone/>
-            </a:pPr>
-            <a:r>
-              <a:rPr lang="en-US" sz="1200" dirty="0">
-                <a:solidFill>
-                  <a:srgbClr val="1C2833"/>
-                </a:solidFill>
-                <a:latin typeface="Arial" pitchFamily="34" charset="0"/>
-                <a:ea typeface="Arial" pitchFamily="34" charset="-122"/>
-                <a:cs typeface="Arial" pitchFamily="34" charset="-120"/>
-              </a:rPr>
-              <a:t>)</a:t>
-            </a:r>
-            <a:endParaRPr lang="en-US" sz="1200" dirty="0"/>
-          </a:p>
-        </p:txBody>
-      </p:sp>
-      <p:sp>
-        <p:nvSpPr>
-          <p:cNvPr id="7" name="Text 5"/>
-          <p:cNvSpPr/>
-          <p:nvPr/>
-        </p:nvSpPr>
-        <p:spPr>
-          <a:xfrm>
-            <a:off x="634901" y="2281982"/>
-            <a:ext cx="8102798" cy="731341"/>
-          </a:xfrm>
-          <a:prstGeom prst="rect">
-            <a:avLst/>
-          </a:prstGeom>
-          <a:noFill/>
-          <a:ln/>
-        </p:spPr>
-        <p:txBody>
-          <a:bodyPr wrap="square" lIns="0" tIns="0" rIns="0" bIns="0" rtlCol="0" anchor="t"/>
-          <a:lstStyle/>
           <a:p>
             <a:pPr algn="l" marL="342900" indent="-342900">
               <a:lnSpc>
@@ -3617,15 +4919,15 @@
               <a:buChar char="•"/>
             </a:pPr>
             <a:r>
-              <a:rPr lang="en-US" sz="1200" b="1" dirty="0">
-                <a:solidFill>
-                  <a:srgbClr val="1C2833"/>
-                </a:solidFill>
-                <a:latin typeface="Arial" pitchFamily="34" charset="0"/>
-                <a:ea typeface="Arial" pitchFamily="34" charset="-122"/>
-                <a:cs typeface="Arial" pitchFamily="34" charset="-120"/>
-              </a:rPr>
-              <a:t>Sprint 2 (10 min) — First artefact.</a:t>
+              <a:rPr lang="en-US" sz="1200" dirty="0">
+                <a:solidFill>
+                  <a:srgbClr val="1C2833"/>
+                </a:solidFill>
+                <a:latin typeface="Arial" pitchFamily="34" charset="0"/>
+                <a:ea typeface="Arial" pitchFamily="34" charset="-122"/>
+                <a:cs typeface="Arial" pitchFamily="34" charset="-120"/>
+              </a:rPr>
+              <a:t>Hand out the rubric. Walk through it in 60 seconds: </a:t>
             </a:r>
             <a:pPr algn="l" indent="0" marL="0">
               <a:lnSpc>
@@ -3637,207 +4939,23 @@
               <a:buNone/>
             </a:pPr>
             <a:r>
-              <a:rPr lang="en-US" sz="1200" dirty="0">
-                <a:solidFill>
-                  <a:srgbClr val="1C2833"/>
-                </a:solidFill>
-                <a:latin typeface="Arial" pitchFamily="34" charset="0"/>
-                <a:ea typeface="Arial" pitchFamily="34" charset="-122"/>
-                <a:cs typeface="Arial" pitchFamily="34" charset="-120"/>
-              </a:rPr>
-              <a:t> Pairs start building. Teacher does rapid-rotation: 90 seconds per pair, asking one focused question.</a:t>
+              <a:rPr lang="en-US" sz="1200" i="1" dirty="0">
+                <a:solidFill>
+                  <a:srgbClr val="1C2833"/>
+                </a:solidFill>
+                <a:latin typeface="Arial" pitchFamily="34" charset="0"/>
+                <a:ea typeface="Arial" pitchFamily="34" charset="-122"/>
+                <a:cs typeface="Arial" pitchFamily="34" charset="-120"/>
+              </a:rPr>
+              <a:t>"You'll be graded on accuracy, use of sources, originality, communication, collaboration, and presentation. Highest mark in each row is 4."</a:t>
             </a:r>
             <a:endParaRPr lang="en-US" sz="1200" dirty="0"/>
           </a:p>
-          <a:p>
-            <a:pPr algn="l" marL="342900" indent="-342900">
-              <a:lnSpc>
-                <a:spcPts val="1620"/>
-              </a:lnSpc>
-              <a:spcAft>
-                <a:spcPts val="300"/>
-              </a:spcAft>
-              <a:buSzPct val="100000"/>
-              <a:buChar char="•"/>
-            </a:pPr>
-            <a:r>
-              <a:rPr lang="en-US" sz="1200" b="1" dirty="0">
-                <a:solidFill>
-                  <a:srgbClr val="1C2833"/>
-                </a:solidFill>
-                <a:latin typeface="Arial" pitchFamily="34" charset="0"/>
-                <a:ea typeface="Arial" pitchFamily="34" charset="-122"/>
-                <a:cs typeface="Arial" pitchFamily="34" charset="-120"/>
-              </a:rPr>
-              <a:t>Sprint 3 (10 min) — Build / iterate.</a:t>
-            </a:r>
-            <a:pPr algn="l" indent="0" marL="0">
-              <a:lnSpc>
-                <a:spcPts val="1620"/>
-              </a:lnSpc>
-              <a:spcAft>
-                <a:spcPts val="300"/>
-              </a:spcAft>
-              <a:buNone/>
-            </a:pPr>
-            <a:r>
-              <a:rPr lang="en-US" sz="1200" dirty="0">
-                <a:solidFill>
-                  <a:srgbClr val="1C2833"/>
-                </a:solidFill>
-                <a:latin typeface="Arial" pitchFamily="34" charset="0"/>
-                <a:ea typeface="Arial" pitchFamily="34" charset="-122"/>
-                <a:cs typeface="Arial" pitchFamily="34" charset="-120"/>
-              </a:rPr>
-              <a:t> Continue.</a:t>
-            </a:r>
-            <a:endParaRPr lang="en-US" sz="1200" dirty="0"/>
-          </a:p>
-        </p:txBody>
-      </p:sp>
-      <p:sp>
-        <p:nvSpPr>
-          <p:cNvPr id="8" name="Text 6"/>
-          <p:cNvSpPr/>
-          <p:nvPr/>
-        </p:nvSpPr>
-        <p:spPr>
-          <a:xfrm>
-            <a:off x="406301" y="3102173"/>
-            <a:ext cx="8498026" cy="639812"/>
-          </a:xfrm>
-          <a:prstGeom prst="rect">
-            <a:avLst/>
-          </a:prstGeom>
-          <a:noFill/>
-          <a:ln/>
-        </p:spPr>
-        <p:txBody>
-          <a:bodyPr wrap="square" lIns="0" tIns="0" rIns="0" bIns="0" rtlCol="0" anchor="t"/>
-          <a:lstStyle/>
-          <a:p>
-            <a:pPr algn="l" indent="0" marL="0">
-              <a:lnSpc>
-                <a:spcPts val="1680"/>
-              </a:lnSpc>
-              <a:spcBef>
-                <a:spcPts val="300"/>
-              </a:spcBef>
-              <a:spcAft>
-                <a:spcPts val="300"/>
-              </a:spcAft>
-              <a:buNone/>
-            </a:pPr>
-            <a:r>
-              <a:rPr lang="en-US" sz="1200" dirty="0">
-                <a:solidFill>
-                  <a:srgbClr val="1C2833"/>
-                </a:solidFill>
-                <a:latin typeface="Arial" pitchFamily="34" charset="0"/>
-                <a:ea typeface="Arial" pitchFamily="34" charset="-122"/>
-                <a:cs typeface="Arial" pitchFamily="34" charset="-120"/>
-              </a:rPr>
-              <a:t>Teacher's role during sprints: – 30-second visit to each pair in Sprint 2. – Watch for pairs who are </a:t>
-            </a:r>
-            <a:pPr algn="l" indent="0" marL="0">
-              <a:lnSpc>
-                <a:spcPts val="1680"/>
-              </a:lnSpc>
-              <a:spcBef>
-                <a:spcPts val="300"/>
-              </a:spcBef>
-              <a:spcAft>
-                <a:spcPts val="300"/>
-              </a:spcAft>
-              <a:buNone/>
-            </a:pPr>
-            <a:r>
-              <a:rPr lang="en-US" sz="1200" i="1" dirty="0">
-                <a:solidFill>
-                  <a:srgbClr val="1C2833"/>
-                </a:solidFill>
-                <a:latin typeface="Arial" pitchFamily="34" charset="0"/>
-                <a:ea typeface="Arial" pitchFamily="34" charset="-122"/>
-                <a:cs typeface="Arial" pitchFamily="34" charset="-120"/>
-              </a:rPr>
-              <a:t>still planning</a:t>
-            </a:r>
-            <a:pPr algn="l" indent="0" marL="0">
-              <a:lnSpc>
-                <a:spcPts val="1680"/>
-              </a:lnSpc>
-              <a:spcBef>
-                <a:spcPts val="300"/>
-              </a:spcBef>
-              <a:spcAft>
-                <a:spcPts val="300"/>
-              </a:spcAft>
-              <a:buNone/>
-            </a:pPr>
-            <a:r>
-              <a:rPr lang="en-US" sz="1200" dirty="0">
-                <a:solidFill>
-                  <a:srgbClr val="1C2833"/>
-                </a:solidFill>
-                <a:latin typeface="Arial" pitchFamily="34" charset="0"/>
-                <a:ea typeface="Arial" pitchFamily="34" charset="-122"/>
-                <a:cs typeface="Arial" pitchFamily="34" charset="-120"/>
-              </a:rPr>
-              <a:t> during Sprint 2. Pull them aside, force a "start drawing / start writing / start building NOW" intervention. – For projects on </a:t>
-            </a:r>
-            <a:pPr algn="l" indent="0" marL="0">
-              <a:lnSpc>
-                <a:spcPts val="1680"/>
-              </a:lnSpc>
-              <a:spcBef>
-                <a:spcPts val="300"/>
-              </a:spcBef>
-              <a:spcAft>
-                <a:spcPts val="300"/>
-              </a:spcAft>
-              <a:buNone/>
-            </a:pPr>
-            <a:r>
-              <a:rPr lang="en-US" sz="1200" i="1" dirty="0">
-                <a:solidFill>
-                  <a:srgbClr val="1C2833"/>
-                </a:solidFill>
-                <a:latin typeface="Arial" pitchFamily="34" charset="0"/>
-                <a:ea typeface="Arial" pitchFamily="34" charset="-122"/>
-                <a:cs typeface="Arial" pitchFamily="34" charset="-120"/>
-              </a:rPr>
-              <a:t>ākāśa</a:t>
-            </a:r>
-            <a:pPr algn="l" indent="0" marL="0">
-              <a:lnSpc>
-                <a:spcPts val="1680"/>
-              </a:lnSpc>
-              <a:spcBef>
-                <a:spcPts val="300"/>
-              </a:spcBef>
-              <a:spcAft>
-                <a:spcPts val="300"/>
-              </a:spcAft>
-              <a:buNone/>
-            </a:pPr>
-            <a:r>
-              <a:rPr lang="en-US" sz="1200" dirty="0">
-                <a:solidFill>
-                  <a:srgbClr val="1C2833"/>
-                </a:solidFill>
-                <a:latin typeface="Arial" pitchFamily="34" charset="0"/>
-                <a:ea typeface="Arial" pitchFamily="34" charset="-122"/>
-                <a:cs typeface="Arial" pitchFamily="34" charset="-120"/>
-              </a:rPr>
-              <a:t> (often the trickiest), check that they've found a concrete way to show emptiness — silence, white-space, a pause, a gap.</a:t>
-            </a:r>
-            <a:endParaRPr lang="en-US" sz="1200" dirty="0"/>
-          </a:p>
-        </p:txBody>
-      </p:sp>
-      <p:sp>
-        <p:nvSpPr>
-          <p:cNvPr id="9" name="Text 7"/>
+        </p:txBody>
+      </p:sp>
+      <p:sp>
+        <p:nvSpPr>
+          <p:cNvPr id="5" name="Text 3"/>
           <p:cNvSpPr/>
           <p:nvPr/>
         </p:nvSpPr>
@@ -3987,7 +5105,7 @@
                 <a:ea typeface="Georgia" pitchFamily="34" charset="-122"/>
                 <a:cs typeface="Georgia" pitchFamily="34" charset="-120"/>
               </a:rPr>
-              <a:t>Wrap-up (5 min)</a:t>
+              <a:t>Core (35 min) — Workshop</a:t>
             </a:r>
             <a:endParaRPr lang="en-US" sz="1800" dirty="0"/>
           </a:p>
@@ -4002,7 +5120,7 @@
         <p:spPr>
           <a:xfrm>
             <a:off x="406301" y="870942"/>
-            <a:ext cx="8498026" cy="426541"/>
+            <a:ext cx="8498026" cy="213271"/>
           </a:xfrm>
           <a:prstGeom prst="rect">
             <a:avLst/>
@@ -4027,6 +5145,29 @@
               <a:buNone/>
             </a:pPr>
             <a:r>
+              <a:rPr lang="en-US" sz="1200" b="1" dirty="0">
+                <a:solidFill>
+                  <a:srgbClr val="1C2833"/>
+                </a:solidFill>
+                <a:latin typeface="Arial" pitchFamily="34" charset="0"/>
+                <a:ea typeface="Arial" pitchFamily="34" charset="-122"/>
+                <a:cs typeface="Arial" pitchFamily="34" charset="-120"/>
+              </a:rPr>
+              <a:t>Structure:</a:t>
+            </a:r>
+            <a:pPr algn="l" indent="0" marL="0">
+              <a:lnSpc>
+                <a:spcPts val="1680"/>
+              </a:lnSpc>
+              <a:spcBef>
+                <a:spcPts val="300"/>
+              </a:spcBef>
+              <a:spcAft>
+                <a:spcPts val="300"/>
+              </a:spcAft>
+              <a:buNone/>
+            </a:pPr>
+            <a:r>
               <a:rPr lang="en-US" sz="1200" dirty="0">
                 <a:solidFill>
                   <a:srgbClr val="1C2833"/>
@@ -4035,7 +5176,7 @@
                 <a:ea typeface="Arial" pitchFamily="34" charset="-122"/>
                 <a:cs typeface="Arial" pitchFamily="34" charset="-120"/>
               </a:rPr>
-              <a:t>– 30-second share-out from any 4 pairs (you call them) — they hold up their progress. – Submit project plan paragraph at the door on the way out. – Preview Day 9: refine and rehearse.</a:t>
+              <a:t> Three 10-minute sprints with a 1-minute "stand and stretch" between each.</a:t>
             </a:r>
             <a:endParaRPr lang="en-US" sz="1200" dirty="0"/>
           </a:p>
@@ -4193,7 +5334,7 @@
                 <a:ea typeface="Georgia" pitchFamily="34" charset="-122"/>
                 <a:cs typeface="Georgia" pitchFamily="34" charset="-120"/>
               </a:rPr>
-              <a:t>Student-facing content</a:t>
+              <a:t>Core (35 min) — Workshop (cont.)</a:t>
             </a:r>
             <a:endParaRPr lang="en-US" sz="1800" dirty="0"/>
           </a:p>
@@ -4207,61 +5348,8 @@
         </p:nvSpPr>
         <p:spPr>
           <a:xfrm>
-            <a:off x="406301" y="883593"/>
-            <a:ext cx="8331398" cy="2688431"/>
-          </a:xfrm>
-          <a:prstGeom prst="rect">
-            <a:avLst/>
-          </a:prstGeom>
-          <a:solidFill>
-            <a:srgbClr val="F4F8F9"/>
-          </a:solidFill>
-          <a:ln/>
-        </p:spPr>
-        <p:txBody>
-          <a:bodyPr wrap="square" rtlCol="0" anchor="ctr"/>
-          <a:lstStyle/>
-          <a:p>
-            <a:pPr indent="0" marL="0">
-              <a:buNone/>
-            </a:pPr>
-            <a:endParaRPr lang="en-US" dirty="0"/>
-          </a:p>
-        </p:txBody>
-      </p:sp>
-      <p:sp>
-        <p:nvSpPr>
-          <p:cNvPr id="5" name="Shape 3"/>
-          <p:cNvSpPr/>
-          <p:nvPr/>
-        </p:nvSpPr>
-        <p:spPr>
-          <a:xfrm>
-            <a:off x="434876" y="883593"/>
-            <a:ext cx="0" cy="2688431"/>
-          </a:xfrm>
-          <a:prstGeom prst="line">
-            <a:avLst/>
-          </a:prstGeom>
-          <a:noFill/>
-          <a:ln w="57150">
-            <a:solidFill>
-              <a:srgbClr val="FE4447"/>
-            </a:solidFill>
-            <a:prstDash val="solid"/>
-          </a:ln>
-        </p:spPr>
-      </p:sp>
-      <p:sp>
-        <p:nvSpPr>
-          <p:cNvPr id="6" name="Text 4"/>
-          <p:cNvSpPr/>
-          <p:nvPr/>
-        </p:nvSpPr>
-        <p:spPr>
-          <a:xfrm>
-            <a:off x="692051" y="1074093"/>
-            <a:ext cx="7973389" cy="230981"/>
+            <a:off x="634901" y="883593"/>
+            <a:ext cx="8102798" cy="2213074"/>
           </a:xfrm>
           <a:prstGeom prst="rect">
             <a:avLst/>
@@ -4273,274 +5361,302 @@
           <a:bodyPr wrap="square" lIns="0" tIns="0" rIns="0" bIns="0" rtlCol="0" anchor="t"/>
           <a:lstStyle/>
           <a:p>
-            <a:pPr algn="l" indent="0" marL="0">
-              <a:lnSpc>
-                <a:spcPts val="1820"/>
-              </a:lnSpc>
-              <a:spcBef>
-                <a:spcPts val="300"/>
-              </a:spcBef>
-              <a:spcAft>
-                <a:spcPts val="300"/>
-              </a:spcAft>
-              <a:buNone/>
-            </a:pPr>
-            <a:r>
-              <a:rPr lang="en-US" sz="1300" b="1" i="1" dirty="0">
-                <a:solidFill>
-                  <a:srgbClr val="1C2833"/>
-                </a:solidFill>
-                <a:latin typeface="Georgia" pitchFamily="34" charset="0"/>
-                <a:ea typeface="Georgia" pitchFamily="34" charset="-122"/>
-                <a:cs typeface="Georgia" pitchFamily="34" charset="-120"/>
-              </a:rPr>
-              <a:t>Project workshop — Session 1</a:t>
-            </a:r>
-            <a:endParaRPr lang="en-US" sz="1300" dirty="0"/>
-          </a:p>
-        </p:txBody>
-      </p:sp>
-      <p:sp>
-        <p:nvSpPr>
-          <p:cNvPr id="7" name="Text 5"/>
-          <p:cNvSpPr/>
-          <p:nvPr/>
-        </p:nvSpPr>
-        <p:spPr>
-          <a:xfrm>
-            <a:off x="692051" y="1343174"/>
-            <a:ext cx="7973389" cy="230981"/>
-          </a:xfrm>
-          <a:prstGeom prst="rect">
-            <a:avLst/>
-          </a:prstGeom>
-          <a:noFill/>
-          <a:ln/>
-        </p:spPr>
-        <p:txBody>
-          <a:bodyPr wrap="square" lIns="0" tIns="0" rIns="0" bIns="0" rtlCol="0" anchor="t"/>
-          <a:lstStyle/>
-          <a:p>
-            <a:pPr algn="l" indent="0" marL="0">
-              <a:lnSpc>
-                <a:spcPts val="1820"/>
-              </a:lnSpc>
-              <a:spcBef>
-                <a:spcPts val="300"/>
-              </a:spcBef>
-              <a:spcAft>
-                <a:spcPts val="300"/>
-              </a:spcAft>
-              <a:buNone/>
-            </a:pPr>
-            <a:r>
-              <a:rPr lang="en-US" sz="1300" i="1" dirty="0">
-                <a:solidFill>
-                  <a:srgbClr val="1C2833"/>
-                </a:solidFill>
-                <a:latin typeface="Georgia" pitchFamily="34" charset="0"/>
-                <a:ea typeface="Georgia" pitchFamily="34" charset="-122"/>
-                <a:cs typeface="Georgia" pitchFamily="34" charset="-120"/>
-              </a:rPr>
-              <a:t>Today you'll plan and start your project. By end of class, your pair should have:</a:t>
-            </a:r>
-            <a:endParaRPr lang="en-US" sz="1300" dirty="0"/>
-          </a:p>
-        </p:txBody>
-      </p:sp>
-      <p:sp>
-        <p:nvSpPr>
-          <p:cNvPr id="8" name="Text 6"/>
-          <p:cNvSpPr/>
-          <p:nvPr/>
-        </p:nvSpPr>
-        <p:spPr>
-          <a:xfrm>
-            <a:off x="692051" y="1612255"/>
-            <a:ext cx="7973389" cy="461963"/>
-          </a:xfrm>
-          <a:prstGeom prst="rect">
-            <a:avLst/>
-          </a:prstGeom>
-          <a:noFill/>
-          <a:ln/>
-        </p:spPr>
-        <p:txBody>
-          <a:bodyPr wrap="square" lIns="0" tIns="0" rIns="0" bIns="0" rtlCol="0" anchor="t"/>
-          <a:lstStyle/>
-          <a:p>
-            <a:pPr algn="l" indent="0" marL="0">
-              <a:lnSpc>
-                <a:spcPts val="1820"/>
-              </a:lnSpc>
-              <a:spcBef>
-                <a:spcPts val="300"/>
-              </a:spcBef>
-              <a:spcAft>
-                <a:spcPts val="300"/>
-              </a:spcAft>
-              <a:buNone/>
-            </a:pPr>
-            <a:r>
-              <a:rPr lang="en-US" sz="1300" i="1" dirty="0">
-                <a:solidFill>
-                  <a:srgbClr val="1C2833"/>
-                </a:solidFill>
-                <a:latin typeface="Georgia" pitchFamily="34" charset="0"/>
-                <a:ea typeface="Georgia" pitchFamily="34" charset="-122"/>
-                <a:cs typeface="Georgia" pitchFamily="34" charset="-120"/>
-              </a:rPr>
-              <a:t>1. A written plan (the paragraph you turn in today). 2. Your first concrete artefact in progress — even if rough.</a:t>
-            </a:r>
-            <a:endParaRPr lang="en-US" sz="1300" dirty="0"/>
-          </a:p>
-        </p:txBody>
-      </p:sp>
-      <p:sp>
-        <p:nvSpPr>
-          <p:cNvPr id="9" name="Text 7"/>
-          <p:cNvSpPr/>
-          <p:nvPr/>
-        </p:nvSpPr>
-        <p:spPr>
-          <a:xfrm>
-            <a:off x="692051" y="2112318"/>
-            <a:ext cx="7973389" cy="230981"/>
-          </a:xfrm>
-          <a:prstGeom prst="rect">
-            <a:avLst/>
-          </a:prstGeom>
-          <a:noFill/>
-          <a:ln/>
-        </p:spPr>
-        <p:txBody>
-          <a:bodyPr wrap="square" lIns="0" tIns="0" rIns="0" bIns="0" rtlCol="0" anchor="t"/>
-          <a:lstStyle/>
-          <a:p>
-            <a:pPr algn="l" indent="0" marL="0">
-              <a:lnSpc>
-                <a:spcPts val="1820"/>
-              </a:lnSpc>
-              <a:spcBef>
-                <a:spcPts val="300"/>
-              </a:spcBef>
-              <a:spcAft>
-                <a:spcPts val="300"/>
-              </a:spcAft>
-              <a:buNone/>
-            </a:pPr>
-            <a:r>
-              <a:rPr lang="en-US" sz="1300" b="1" i="1" dirty="0">
-                <a:solidFill>
-                  <a:srgbClr val="1C2833"/>
-                </a:solidFill>
-                <a:latin typeface="Georgia" pitchFamily="34" charset="0"/>
-                <a:ea typeface="Georgia" pitchFamily="34" charset="-122"/>
-                <a:cs typeface="Georgia" pitchFamily="34" charset="-120"/>
-              </a:rPr>
-              <a:t>Plan template:</a:t>
-            </a:r>
-            <a:endParaRPr lang="en-US" sz="1300" dirty="0"/>
-          </a:p>
-        </p:txBody>
-      </p:sp>
-      <p:sp>
-        <p:nvSpPr>
-          <p:cNvPr id="10" name="Text 8"/>
-          <p:cNvSpPr/>
-          <p:nvPr/>
-        </p:nvSpPr>
-        <p:spPr>
-          <a:xfrm>
-            <a:off x="692051" y="2381399"/>
-            <a:ext cx="7973389" cy="1000125"/>
-          </a:xfrm>
-          <a:prstGeom prst="rect">
-            <a:avLst/>
-          </a:prstGeom>
-          <a:noFill/>
-          <a:ln/>
-        </p:spPr>
-        <p:txBody>
-          <a:bodyPr wrap="square" lIns="0" tIns="0" rIns="0" bIns="0" rtlCol="0" anchor="t"/>
-          <a:lstStyle/>
-          <a:p>
-            <a:pPr algn="l" indent="0" marL="0">
-              <a:lnSpc>
-                <a:spcPts val="1820"/>
-              </a:lnSpc>
-              <a:spcBef>
-                <a:spcPts val="300"/>
-              </a:spcBef>
-              <a:spcAft>
-                <a:spcPts val="300"/>
-              </a:spcAft>
-              <a:buNone/>
-            </a:pPr>
-            <a:r>
-              <a:rPr lang="en-US" sz="1300" dirty="0">
-                <a:solidFill>
-                  <a:srgbClr val="1C2833"/>
-                </a:solidFill>
-                <a:latin typeface="Georgia" pitchFamily="34" charset="0"/>
-                <a:ea typeface="Georgia" pitchFamily="34" charset="-122"/>
-                <a:cs typeface="Georgia" pitchFamily="34" charset="-120"/>
-              </a:rPr>
-              <a:t>``</a:t>
-            </a:r>
-            <a:pPr algn="l" indent="0" marL="0">
-              <a:lnSpc>
-                <a:spcPts val="1820"/>
-              </a:lnSpc>
-              <a:spcBef>
-                <a:spcPts val="300"/>
-              </a:spcBef>
-              <a:spcAft>
-                <a:spcPts val="300"/>
-              </a:spcAft>
-              <a:buNone/>
-            </a:pPr>
-            <a:r>
-              <a:rPr lang="en-US" sz="1300" i="1" dirty="0">
-                <a:solidFill>
-                  <a:srgbClr val="1C2833"/>
-                </a:solidFill>
-                <a:latin typeface="Georgia" pitchFamily="34" charset="0"/>
-                <a:ea typeface="Georgia" pitchFamily="34" charset="-122"/>
-                <a:cs typeface="Georgia" pitchFamily="34" charset="-120"/>
-              </a:rPr>
-              <a:t> Element: __________ Title: __________ Audience walks away thinking: __________ Structure (3 parts): 1. __________ 2. __________ 3. __________ Division of labour (Partner A): __________ Division of labour (Partner B): __________ Sources we'll cite: - __________ (from class cache or sources.md)</a:t>
-            </a:r>
-            <a:pPr algn="l" indent="0" marL="0">
-              <a:lnSpc>
-                <a:spcPts val="1820"/>
-              </a:lnSpc>
-              <a:spcBef>
-                <a:spcPts val="300"/>
-              </a:spcBef>
-              <a:spcAft>
-                <a:spcPts val="300"/>
-              </a:spcAft>
-              <a:buNone/>
-            </a:pPr>
-            <a:r>
-              <a:rPr lang="en-US" sz="1300" dirty="0">
-                <a:solidFill>
-                  <a:srgbClr val="1C2833"/>
-                </a:solidFill>
-                <a:latin typeface="Georgia" pitchFamily="34" charset="0"/>
-                <a:ea typeface="Georgia" pitchFamily="34" charset="-122"/>
-                <a:cs typeface="Georgia" pitchFamily="34" charset="-120"/>
-              </a:rPr>
-              <a:t>``</a:t>
-            </a:r>
-            <a:endParaRPr lang="en-US" sz="1300" dirty="0"/>
-          </a:p>
-        </p:txBody>
-      </p:sp>
-      <p:sp>
-        <p:nvSpPr>
-          <p:cNvPr id="11" name="Text 9"/>
+            <a:pPr algn="l" marL="342900" indent="-342900">
+              <a:lnSpc>
+                <a:spcPts val="1620"/>
+              </a:lnSpc>
+              <a:spcAft>
+                <a:spcPts val="300"/>
+              </a:spcAft>
+              <a:buSzPct val="100000"/>
+              <a:buChar char="•"/>
+            </a:pPr>
+            <a:r>
+              <a:rPr lang="en-US" sz="1200" b="1" dirty="0">
+                <a:solidFill>
+                  <a:srgbClr val="1C2833"/>
+                </a:solidFill>
+                <a:latin typeface="Arial" pitchFamily="34" charset="0"/>
+                <a:ea typeface="Arial" pitchFamily="34" charset="-122"/>
+                <a:cs typeface="Arial" pitchFamily="34" charset="-120"/>
+              </a:rPr>
+              <a:t>Sprint 1 (10 min) — Plan completion.</a:t>
+            </a:r>
+            <a:pPr algn="l" indent="0" marL="0">
+              <a:lnSpc>
+                <a:spcPts val="1620"/>
+              </a:lnSpc>
+              <a:spcAft>
+                <a:spcPts val="300"/>
+              </a:spcAft>
+              <a:buNone/>
+            </a:pPr>
+            <a:r>
+              <a:rPr lang="en-US" sz="1200" dirty="0">
+                <a:solidFill>
+                  <a:srgbClr val="1C2833"/>
+                </a:solidFill>
+                <a:latin typeface="Arial" pitchFamily="34" charset="0"/>
+                <a:ea typeface="Arial" pitchFamily="34" charset="-122"/>
+                <a:cs typeface="Arial" pitchFamily="34" charset="-120"/>
+              </a:rPr>
+              <a:t> Every pair finalises:</a:t>
+            </a:r>
+            <a:endParaRPr lang="en-US" sz="1200" dirty="0"/>
+          </a:p>
+          <a:p>
+            <a:pPr algn="l" marL="342900" indent="-342900">
+              <a:lnSpc>
+                <a:spcPts val="1620"/>
+              </a:lnSpc>
+              <a:spcAft>
+                <a:spcPts val="300"/>
+              </a:spcAft>
+              <a:buSzPct val="100000"/>
+              <a:buChar char="•"/>
+            </a:pPr>
+            <a:r>
+              <a:rPr lang="en-US" sz="1200" dirty="0">
+                <a:solidFill>
+                  <a:srgbClr val="1C2833"/>
+                </a:solidFill>
+                <a:latin typeface="Arial" pitchFamily="34" charset="0"/>
+                <a:ea typeface="Arial" pitchFamily="34" charset="-122"/>
+                <a:cs typeface="Arial" pitchFamily="34" charset="-120"/>
+              </a:rPr>
+              <a:t>Element + project title</a:t>
+            </a:r>
+            <a:endParaRPr lang="en-US" sz="1200" dirty="0"/>
+          </a:p>
+          <a:p>
+            <a:pPr algn="l" marL="342900" indent="-342900">
+              <a:lnSpc>
+                <a:spcPts val="1620"/>
+              </a:lnSpc>
+              <a:spcAft>
+                <a:spcPts val="300"/>
+              </a:spcAft>
+              <a:buSzPct val="100000"/>
+              <a:buChar char="•"/>
+            </a:pPr>
+            <a:r>
+              <a:rPr lang="en-US" sz="1200" dirty="0">
+                <a:solidFill>
+                  <a:srgbClr val="1C2833"/>
+                </a:solidFill>
+                <a:latin typeface="Arial" pitchFamily="34" charset="0"/>
+                <a:ea typeface="Arial" pitchFamily="34" charset="-122"/>
+                <a:cs typeface="Arial" pitchFamily="34" charset="-120"/>
+              </a:rPr>
+              <a:t>The single sentence the audience should walk away thinking</a:t>
+            </a:r>
+            <a:endParaRPr lang="en-US" sz="1200" dirty="0"/>
+          </a:p>
+          <a:p>
+            <a:pPr algn="l" marL="342900" indent="-342900">
+              <a:lnSpc>
+                <a:spcPts val="1620"/>
+              </a:lnSpc>
+              <a:spcAft>
+                <a:spcPts val="300"/>
+              </a:spcAft>
+              <a:buSzPct val="100000"/>
+              <a:buChar char="•"/>
+            </a:pPr>
+            <a:r>
+              <a:rPr lang="en-US" sz="1200" dirty="0">
+                <a:solidFill>
+                  <a:srgbClr val="1C2833"/>
+                </a:solidFill>
+                <a:latin typeface="Arial" pitchFamily="34" charset="0"/>
+                <a:ea typeface="Arial" pitchFamily="34" charset="-122"/>
+                <a:cs typeface="Arial" pitchFamily="34" charset="-120"/>
+              </a:rPr>
+              <a:t>The structure (3 parts max: e.g. "what tradition says / one science parallel / one local imbalance")</a:t>
+            </a:r>
+            <a:endParaRPr lang="en-US" sz="1200" dirty="0"/>
+          </a:p>
+          <a:p>
+            <a:pPr algn="l" marL="342900" indent="-342900">
+              <a:lnSpc>
+                <a:spcPts val="1620"/>
+              </a:lnSpc>
+              <a:spcAft>
+                <a:spcPts val="300"/>
+              </a:spcAft>
+              <a:buSzPct val="100000"/>
+              <a:buChar char="•"/>
+            </a:pPr>
+            <a:r>
+              <a:rPr lang="en-US" sz="1200" dirty="0">
+                <a:solidFill>
+                  <a:srgbClr val="1C2833"/>
+                </a:solidFill>
+                <a:latin typeface="Arial" pitchFamily="34" charset="0"/>
+                <a:ea typeface="Arial" pitchFamily="34" charset="-122"/>
+                <a:cs typeface="Arial" pitchFamily="34" charset="-120"/>
+              </a:rPr>
+              <a:t>The division of labour (who does what)</a:t>
+            </a:r>
+            <a:endParaRPr lang="en-US" sz="1200" dirty="0"/>
+          </a:p>
+          <a:p>
+            <a:pPr algn="l" marL="342900" indent="-342900">
+              <a:lnSpc>
+                <a:spcPts val="1620"/>
+              </a:lnSpc>
+              <a:spcAft>
+                <a:spcPts val="300"/>
+              </a:spcAft>
+              <a:buSzPct val="100000"/>
+              <a:buChar char="•"/>
+            </a:pPr>
+            <a:r>
+              <a:rPr lang="en-US" sz="1200" dirty="0">
+                <a:solidFill>
+                  <a:srgbClr val="1C2833"/>
+                </a:solidFill>
+                <a:latin typeface="Arial" pitchFamily="34" charset="0"/>
+                <a:ea typeface="Arial" pitchFamily="34" charset="-122"/>
+                <a:cs typeface="Arial" pitchFamily="34" charset="-120"/>
+              </a:rPr>
+              <a:t>The source(s) they will cite (must include one RAG citation from Day 1–3 caches, OR a citation from </a:t>
+            </a:r>
+            <a:pPr algn="l" indent="0" marL="0">
+              <a:lnSpc>
+                <a:spcPts val="1620"/>
+              </a:lnSpc>
+              <a:spcAft>
+                <a:spcPts val="300"/>
+              </a:spcAft>
+              <a:buNone/>
+            </a:pPr>
+            <a:r>
+              <a:rPr lang="en-US" sz="1200" dirty="0">
+                <a:solidFill>
+                  <a:srgbClr val="1C2833"/>
+                </a:solidFill>
+                <a:latin typeface="Arial" pitchFamily="34" charset="0"/>
+                <a:ea typeface="Arial" pitchFamily="34" charset="-122"/>
+                <a:cs typeface="Arial" pitchFamily="34" charset="-120"/>
+              </a:rPr>
+              <a:t>sources.md</a:t>
+            </a:r>
+            <a:pPr algn="l" indent="0" marL="0">
+              <a:lnSpc>
+                <a:spcPts val="1620"/>
+              </a:lnSpc>
+              <a:spcAft>
+                <a:spcPts val="300"/>
+              </a:spcAft>
+              <a:buNone/>
+            </a:pPr>
+            <a:r>
+              <a:rPr lang="en-US" sz="1200" dirty="0">
+                <a:solidFill>
+                  <a:srgbClr val="1C2833"/>
+                </a:solidFill>
+                <a:latin typeface="Arial" pitchFamily="34" charset="0"/>
+                <a:ea typeface="Arial" pitchFamily="34" charset="-122"/>
+                <a:cs typeface="Arial" pitchFamily="34" charset="-120"/>
+              </a:rPr>
+              <a:t>)</a:t>
+            </a:r>
+            <a:endParaRPr lang="en-US" sz="1200" dirty="0"/>
+          </a:p>
+          <a:p>
+            <a:pPr algn="l" marL="342900" indent="-342900">
+              <a:lnSpc>
+                <a:spcPts val="1620"/>
+              </a:lnSpc>
+              <a:spcAft>
+                <a:spcPts val="300"/>
+              </a:spcAft>
+              <a:buSzPct val="100000"/>
+              <a:buChar char="•"/>
+            </a:pPr>
+            <a:r>
+              <a:rPr lang="en-US" sz="1200" b="1" dirty="0">
+                <a:solidFill>
+                  <a:srgbClr val="1C2833"/>
+                </a:solidFill>
+                <a:latin typeface="Arial" pitchFamily="34" charset="0"/>
+                <a:ea typeface="Arial" pitchFamily="34" charset="-122"/>
+                <a:cs typeface="Arial" pitchFamily="34" charset="-120"/>
+              </a:rPr>
+              <a:t>Sprint 2 (10 min) — First artefact.</a:t>
+            </a:r>
+            <a:pPr algn="l" indent="0" marL="0">
+              <a:lnSpc>
+                <a:spcPts val="1620"/>
+              </a:lnSpc>
+              <a:spcAft>
+                <a:spcPts val="300"/>
+              </a:spcAft>
+              <a:buNone/>
+            </a:pPr>
+            <a:r>
+              <a:rPr lang="en-US" sz="1200" dirty="0">
+                <a:solidFill>
+                  <a:srgbClr val="1C2833"/>
+                </a:solidFill>
+                <a:latin typeface="Arial" pitchFamily="34" charset="0"/>
+                <a:ea typeface="Arial" pitchFamily="34" charset="-122"/>
+                <a:cs typeface="Arial" pitchFamily="34" charset="-120"/>
+              </a:rPr>
+              <a:t> Pairs start building. Teacher does rapid-rotation: 90 seconds per pair, asking one focused question.</a:t>
+            </a:r>
+            <a:endParaRPr lang="en-US" sz="1200" dirty="0"/>
+          </a:p>
+          <a:p>
+            <a:pPr algn="l" marL="342900" indent="-342900">
+              <a:lnSpc>
+                <a:spcPts val="1620"/>
+              </a:lnSpc>
+              <a:spcAft>
+                <a:spcPts val="300"/>
+              </a:spcAft>
+              <a:buSzPct val="100000"/>
+              <a:buChar char="•"/>
+            </a:pPr>
+            <a:r>
+              <a:rPr lang="en-US" sz="1200" b="1" dirty="0">
+                <a:solidFill>
+                  <a:srgbClr val="1C2833"/>
+                </a:solidFill>
+                <a:latin typeface="Arial" pitchFamily="34" charset="0"/>
+                <a:ea typeface="Arial" pitchFamily="34" charset="-122"/>
+                <a:cs typeface="Arial" pitchFamily="34" charset="-120"/>
+              </a:rPr>
+              <a:t>Sprint 3 (10 min) — Build / iterate.</a:t>
+            </a:r>
+            <a:pPr algn="l" indent="0" marL="0">
+              <a:lnSpc>
+                <a:spcPts val="1620"/>
+              </a:lnSpc>
+              <a:spcAft>
+                <a:spcPts val="300"/>
+              </a:spcAft>
+              <a:buNone/>
+            </a:pPr>
+            <a:r>
+              <a:rPr lang="en-US" sz="1200" dirty="0">
+                <a:solidFill>
+                  <a:srgbClr val="1C2833"/>
+                </a:solidFill>
+                <a:latin typeface="Arial" pitchFamily="34" charset="0"/>
+                <a:ea typeface="Arial" pitchFamily="34" charset="-122"/>
+                <a:cs typeface="Arial" pitchFamily="34" charset="-120"/>
+              </a:rPr>
+              <a:t> Continue.</a:t>
+            </a:r>
+            <a:endParaRPr lang="en-US" sz="1200" dirty="0"/>
+          </a:p>
+        </p:txBody>
+      </p:sp>
+      <p:sp>
+        <p:nvSpPr>
+          <p:cNvPr id="5" name="Text 3"/>
           <p:cNvSpPr/>
           <p:nvPr/>
         </p:nvSpPr>
@@ -4690,7 +5806,7 @@
                 <a:ea typeface="Georgia" pitchFamily="34" charset="-122"/>
                 <a:cs typeface="Georgia" pitchFamily="34" charset="-120"/>
               </a:rPr>
-              <a:t>Homework</a:t>
+              <a:t>Core (35 min) — Workshop (cont.)</a:t>
             </a:r>
             <a:endParaRPr lang="en-US" sz="1800" dirty="0"/>
           </a:p>
@@ -4738,15 +5854,82 @@
                 <a:ea typeface="Arial" pitchFamily="34" charset="-122"/>
                 <a:cs typeface="Arial" pitchFamily="34" charset="-120"/>
               </a:rPr>
-              <a:t>– Whatever your pair didn't finish today — finish at home tonight. Tomorrow is for </a:t>
-            </a:r>
-            <a:pPr algn="l" indent="0" marL="0">
-              <a:lnSpc>
-                <a:spcPts val="1680"/>
-              </a:lnSpc>
-              <a:spcBef>
-                <a:spcPts val="300"/>
-              </a:spcBef>
+              <a:t>Teacher's role during sprints:</a:t>
+            </a:r>
+            <a:endParaRPr lang="en-US" sz="1200" dirty="0"/>
+          </a:p>
+        </p:txBody>
+      </p:sp>
+      <p:sp>
+        <p:nvSpPr>
+          <p:cNvPr id="5" name="Text 3"/>
+          <p:cNvSpPr/>
+          <p:nvPr/>
+        </p:nvSpPr>
+        <p:spPr>
+          <a:xfrm>
+            <a:off x="634901" y="1173063"/>
+            <a:ext cx="8102798" cy="1180802"/>
+          </a:xfrm>
+          <a:prstGeom prst="rect">
+            <a:avLst/>
+          </a:prstGeom>
+          <a:noFill/>
+          <a:ln/>
+        </p:spPr>
+        <p:txBody>
+          <a:bodyPr wrap="square" lIns="0" tIns="0" rIns="0" bIns="0" rtlCol="0" anchor="t"/>
+          <a:lstStyle/>
+          <a:p>
+            <a:pPr algn="l" marL="342900" indent="-342900">
+              <a:lnSpc>
+                <a:spcPts val="1620"/>
+              </a:lnSpc>
+              <a:spcAft>
+                <a:spcPts val="300"/>
+              </a:spcAft>
+              <a:buSzPct val="100000"/>
+              <a:buChar char="•"/>
+            </a:pPr>
+            <a:r>
+              <a:rPr lang="en-US" sz="1200" dirty="0">
+                <a:solidFill>
+                  <a:srgbClr val="1C2833"/>
+                </a:solidFill>
+                <a:latin typeface="Arial" pitchFamily="34" charset="0"/>
+                <a:ea typeface="Arial" pitchFamily="34" charset="-122"/>
+                <a:cs typeface="Arial" pitchFamily="34" charset="-120"/>
+              </a:rPr>
+              <a:t>30-second visit to each pair in Sprint 2.</a:t>
+            </a:r>
+            <a:endParaRPr lang="en-US" sz="1200" dirty="0"/>
+          </a:p>
+          <a:p>
+            <a:pPr algn="l" marL="342900" indent="-342900">
+              <a:lnSpc>
+                <a:spcPts val="1620"/>
+              </a:lnSpc>
+              <a:spcAft>
+                <a:spcPts val="300"/>
+              </a:spcAft>
+              <a:buSzPct val="100000"/>
+              <a:buChar char="•"/>
+            </a:pPr>
+            <a:r>
+              <a:rPr lang="en-US" sz="1200" dirty="0">
+                <a:solidFill>
+                  <a:srgbClr val="1C2833"/>
+                </a:solidFill>
+                <a:latin typeface="Arial" pitchFamily="34" charset="0"/>
+                <a:ea typeface="Arial" pitchFamily="34" charset="-122"/>
+                <a:cs typeface="Arial" pitchFamily="34" charset="-120"/>
+              </a:rPr>
+              <a:t>Watch for pairs who are </a:t>
+            </a:r>
+            <a:pPr algn="l" indent="0" marL="0">
+              <a:lnSpc>
+                <a:spcPts val="1620"/>
+              </a:lnSpc>
               <a:spcAft>
                 <a:spcPts val="300"/>
               </a:spcAft>
@@ -4761,15 +5944,12 @@
                 <a:ea typeface="Arial" pitchFamily="34" charset="-122"/>
                 <a:cs typeface="Arial" pitchFamily="34" charset="-120"/>
               </a:rPr>
-              <a:t>refining</a:t>
-            </a:r>
-            <a:pPr algn="l" indent="0" marL="0">
-              <a:lnSpc>
-                <a:spcPts val="1680"/>
-              </a:lnSpc>
-              <a:spcBef>
-                <a:spcPts val="300"/>
-              </a:spcBef>
+              <a:t>still planning</a:t>
+            </a:r>
+            <a:pPr algn="l" indent="0" marL="0">
+              <a:lnSpc>
+                <a:spcPts val="1620"/>
+              </a:lnSpc>
               <a:spcAft>
                 <a:spcPts val="300"/>
               </a:spcAft>
@@ -4784,15 +5964,36 @@
                 <a:ea typeface="Arial" pitchFamily="34" charset="-122"/>
                 <a:cs typeface="Arial" pitchFamily="34" charset="-120"/>
               </a:rPr>
-              <a:t>, not for </a:t>
-            </a:r>
-            <a:pPr algn="l" indent="0" marL="0">
-              <a:lnSpc>
-                <a:spcPts val="1680"/>
-              </a:lnSpc>
-              <a:spcBef>
-                <a:spcPts val="300"/>
-              </a:spcBef>
+              <a:t> during Sprint 2. Pull them aside, force a "start drawing / start writing / start building NOW" intervention.</a:t>
+            </a:r>
+            <a:endParaRPr lang="en-US" sz="1200" dirty="0"/>
+          </a:p>
+          <a:p>
+            <a:pPr algn="l" marL="342900" indent="-342900">
+              <a:lnSpc>
+                <a:spcPts val="1620"/>
+              </a:lnSpc>
+              <a:spcAft>
+                <a:spcPts val="300"/>
+              </a:spcAft>
+              <a:buSzPct val="100000"/>
+              <a:buChar char="•"/>
+            </a:pPr>
+            <a:r>
+              <a:rPr lang="en-US" sz="1200" dirty="0">
+                <a:solidFill>
+                  <a:srgbClr val="1C2833"/>
+                </a:solidFill>
+                <a:latin typeface="Arial" pitchFamily="34" charset="0"/>
+                <a:ea typeface="Arial" pitchFamily="34" charset="-122"/>
+                <a:cs typeface="Arial" pitchFamily="34" charset="-120"/>
+              </a:rPr>
+              <a:t>For projects on </a:t>
+            </a:r>
+            <a:pPr algn="l" indent="0" marL="0">
+              <a:lnSpc>
+                <a:spcPts val="1620"/>
+              </a:lnSpc>
               <a:spcAft>
                 <a:spcPts val="300"/>
               </a:spcAft>
@@ -4807,15 +6008,12 @@
                 <a:ea typeface="Arial" pitchFamily="34" charset="-122"/>
                 <a:cs typeface="Arial" pitchFamily="34" charset="-120"/>
               </a:rPr>
-              <a:t>starting</a:t>
-            </a:r>
-            <a:pPr algn="l" indent="0" marL="0">
-              <a:lnSpc>
-                <a:spcPts val="1680"/>
-              </a:lnSpc>
-              <a:spcBef>
-                <a:spcPts val="300"/>
-              </a:spcBef>
+              <a:t>ākāśa</a:t>
+            </a:r>
+            <a:pPr algn="l" indent="0" marL="0">
+              <a:lnSpc>
+                <a:spcPts val="1620"/>
+              </a:lnSpc>
               <a:spcAft>
                 <a:spcPts val="300"/>
               </a:spcAft>
@@ -4830,7 +6028,7 @@
                 <a:ea typeface="Arial" pitchFamily="34" charset="-122"/>
                 <a:cs typeface="Arial" pitchFamily="34" charset="-120"/>
               </a:rPr>
-              <a:t>.</a:t>
+              <a:t> (often the trickiest), check that they've found a concrete way to show emptiness — silence, white-space, a pause, a gap.</a:t>
             </a:r>
             <a:endParaRPr lang="en-US" sz="1200" dirty="0"/>
           </a:p>
@@ -4838,7 +6036,7 @@
       </p:sp>
       <p:sp>
         <p:nvSpPr>
-          <p:cNvPr id="5" name="Text 3"/>
+          <p:cNvPr id="6" name="Text 4"/>
           <p:cNvSpPr/>
           <p:nvPr/>
         </p:nvSpPr>
@@ -4988,7 +6186,7 @@
                 <a:ea typeface="Georgia" pitchFamily="34" charset="-122"/>
                 <a:cs typeface="Georgia" pitchFamily="34" charset="-120"/>
               </a:rPr>
-              <a:t>Differentiation</a:t>
+              <a:t>Wrap-up (5 min)</a:t>
             </a:r>
             <a:endParaRPr lang="en-US" sz="1800" dirty="0"/>
           </a:p>
@@ -5003,7 +6201,7 @@
         <p:spPr>
           <a:xfrm>
             <a:off x="634901" y="883593"/>
-            <a:ext cx="8102798" cy="937022"/>
+            <a:ext cx="8102798" cy="769441"/>
           </a:xfrm>
           <a:prstGeom prst="rect">
             <a:avLst/>
@@ -5026,26 +6224,6 @@
               <a:buChar char="•"/>
             </a:pPr>
             <a:r>
-              <a:rPr lang="en-US" sz="1200" b="1" dirty="0">
-                <a:solidFill>
-                  <a:srgbClr val="1C2833"/>
-                </a:solidFill>
-                <a:latin typeface="Arial" pitchFamily="34" charset="0"/>
-                <a:ea typeface="Arial" pitchFamily="34" charset="-122"/>
-                <a:cs typeface="Arial" pitchFamily="34" charset="-120"/>
-              </a:rPr>
-              <a:t>One tier up:</a:t>
-            </a:r>
-            <a:pPr algn="l" indent="0" marL="0">
-              <a:lnSpc>
-                <a:spcPts val="1620"/>
-              </a:lnSpc>
-              <a:spcAft>
-                <a:spcPts val="300"/>
-              </a:spcAft>
-              <a:buNone/>
-            </a:pPr>
-            <a:r>
               <a:rPr lang="en-US" sz="1200" dirty="0">
                 <a:solidFill>
                   <a:srgbClr val="1C2833"/>
@@ -5054,7 +6232,7 @@
                 <a:ea typeface="Arial" pitchFamily="34" charset="-122"/>
                 <a:cs typeface="Arial" pitchFamily="34" charset="-120"/>
               </a:rPr>
-              <a:t> Stretch goal — add an interactive element (a question for the audience, a small experiment they can join). Adds depth.</a:t>
+              <a:t>30-second share-out from any 4 pairs (you call them) — they hold up their progress.</a:t>
             </a:r>
             <a:endParaRPr lang="en-US" sz="1200" dirty="0"/>
           </a:p>
@@ -5070,24 +6248,28 @@
               <a:buChar char="•"/>
             </a:pPr>
             <a:r>
-              <a:rPr lang="en-US" sz="1200" b="1" dirty="0">
-                <a:solidFill>
-                  <a:srgbClr val="1C2833"/>
-                </a:solidFill>
-                <a:latin typeface="Arial" pitchFamily="34" charset="0"/>
-                <a:ea typeface="Arial" pitchFamily="34" charset="-122"/>
-                <a:cs typeface="Arial" pitchFamily="34" charset="-120"/>
-              </a:rPr>
-              <a:t>One tier down:</a:t>
-            </a:r>
-            <a:pPr algn="l" indent="0" marL="0">
+              <a:rPr lang="en-US" sz="1200" dirty="0">
+                <a:solidFill>
+                  <a:srgbClr val="1C2833"/>
+                </a:solidFill>
+                <a:latin typeface="Arial" pitchFamily="34" charset="0"/>
+                <a:ea typeface="Arial" pitchFamily="34" charset="-122"/>
+                <a:cs typeface="Arial" pitchFamily="34" charset="-120"/>
+              </a:rPr>
+              <a:t>Submit project plan paragraph at the door on the way out.</a:t>
+            </a:r>
+            <a:endParaRPr lang="en-US" sz="1200" dirty="0"/>
+          </a:p>
+          <a:p>
+            <a:pPr algn="l" marL="342900" indent="-342900">
               <a:lnSpc>
                 <a:spcPts val="1620"/>
               </a:lnSpc>
               <a:spcAft>
                 <a:spcPts val="300"/>
               </a:spcAft>
-              <a:buNone/>
+              <a:buSzPct val="100000"/>
+              <a:buChar char="•"/>
             </a:pPr>
             <a:r>
               <a:rPr lang="en-US" sz="1200" dirty="0">
@@ -5098,47 +6280,7 @@
                 <a:ea typeface="Arial" pitchFamily="34" charset="-122"/>
                 <a:cs typeface="Arial" pitchFamily="34" charset="-120"/>
               </a:rPr>
-              <a:t> Allow choosing a </a:t>
-            </a:r>
-            <a:pPr algn="l" indent="0" marL="0">
-              <a:lnSpc>
-                <a:spcPts val="1620"/>
-              </a:lnSpc>
-              <a:spcAft>
-                <a:spcPts val="300"/>
-              </a:spcAft>
-              <a:buNone/>
-            </a:pPr>
-            <a:r>
-              <a:rPr lang="en-US" sz="1200" i="1" dirty="0">
-                <a:solidFill>
-                  <a:srgbClr val="1C2833"/>
-                </a:solidFill>
-                <a:latin typeface="Arial" pitchFamily="34" charset="0"/>
-                <a:ea typeface="Arial" pitchFamily="34" charset="-122"/>
-                <a:cs typeface="Arial" pitchFamily="34" charset="-120"/>
-              </a:rPr>
-              <a:t>simpler</a:t>
-            </a:r>
-            <a:pPr algn="l" indent="0" marL="0">
-              <a:lnSpc>
-                <a:spcPts val="1620"/>
-              </a:lnSpc>
-              <a:spcAft>
-                <a:spcPts val="300"/>
-              </a:spcAft>
-              <a:buNone/>
-            </a:pPr>
-            <a:r>
-              <a:rPr lang="en-US" sz="1200" dirty="0">
-                <a:solidFill>
-                  <a:srgbClr val="1C2833"/>
-                </a:solidFill>
-                <a:latin typeface="Arial" pitchFamily="34" charset="0"/>
-                <a:ea typeface="Arial" pitchFamily="34" charset="-122"/>
-                <a:cs typeface="Arial" pitchFamily="34" charset="-120"/>
-              </a:rPr>
-              <a:t> format mid-stream if the original plan is collapsing. A clear poster beats a half-built video.</a:t>
+              <a:t>Preview Day 9: refine and rehearse.</a:t>
             </a:r>
             <a:endParaRPr lang="en-US" sz="1200" dirty="0"/>
           </a:p>
